--- a/Foundations-Human-Anatomy.pptx
+++ b/Foundations-Human-Anatomy.pptx
@@ -35,10 +35,6 @@
     <p:sldId id="283" r:id="rId34"/>
     <p:sldId id="284" r:id="rId35"/>
     <p:sldId id="285" r:id="rId36"/>
-    <p:sldId id="286" r:id="rId37"/>
-    <p:sldId id="287" r:id="rId38"/>
-    <p:sldId id="288" r:id="rId39"/>
-    <p:sldId id="289" r:id="rId40"/>
   </p:sldIdLst>
   <p:sldSz cx="12191695" cy="6858000" type="screen4x3"/>
   <p:notesSz cx="6858000" cy="9144000"/>
@@ -3245,8 +3241,8 @@
         </p:blipFill>
         <p:spPr>
           <a:xfrm>
-            <a:off x="822960" y="411480"/>
-            <a:ext cx="960120" cy="1137373"/>
+            <a:off x="901337" y="411480"/>
+            <a:ext cx="849085" cy="1005839"/>
           </a:xfrm>
           <a:prstGeom prst="rect">
             <a:avLst/>
@@ -3300,7 +3296,7 @@
           <a:lstStyle/>
           <a:p>
             <a:r>
-              <a:rPr sz="3000" b="1" i="0">
+              <a:rPr sz="2900" b="1" i="0">
                 <a:solidFill>
                   <a:srgbClr val="0B1530"/>
                 </a:solidFill>
@@ -3340,14 +3336,14 @@
                 </a:solidFill>
                 <a:latin typeface="Calibri"/>
               </a:rPr>
-              <a:t>HUMAN ANATOMY · FOUNDATIONS</a:t>
+              <a:t>FOCUS: HUMAN ANATOMY · FOUNDATIONS</a:t>
             </a:r>
           </a:p>
         </p:txBody>
       </p:sp>
       <p:pic>
         <p:nvPicPr>
-          <p:cNvPr id="4" name="Picture 3" descr="Anterior view of the body with regional terms labeled: frontal, orbital, nasal, oral, buccal, mental, cervical, thoracic, sternal, mammary, abdominal, umbilical, brachial, antecubital, antebrachial, carpal, coxal, femoral, patellar, crural, tarsal."/>
+          <p:cNvPr id="4" name="Picture 3" descr="Anterior view of the body with regional terms labeled: frontal, orbital, nasal, oral, buccal, cervical, thoracic, sternal, abdominal, umbilical, brachial, antecubital, carpal, femoral, patellar, crural, tarsal."/>
           <p:cNvPicPr>
             <a:picLocks noChangeAspect="1"/>
           </p:cNvPicPr>
@@ -3361,8 +3357,8 @@
         </p:blipFill>
         <p:spPr>
           <a:xfrm>
-            <a:off x="731520" y="1691640"/>
-            <a:ext cx="5394960" cy="3034665"/>
+            <a:off x="274320" y="2516063"/>
+            <a:ext cx="5852160" cy="3288914"/>
           </a:xfrm>
           <a:prstGeom prst="rect">
             <a:avLst/>
@@ -3371,7 +3367,7 @@
       </p:pic>
       <p:pic>
         <p:nvPicPr>
-          <p:cNvPr id="5" name="Picture 4" descr="Posterior view of the body with regional terms labeled: occipital, cervical, scapular, vertebral, lumbar, sacral, gluteal, femoral, popliteal, sural, calcaneal."/>
+          <p:cNvPr id="5" name="Picture 4" descr="Posterior view with regional terms labeled: occipital, cervical, scapular, vertebral, lumbar, sacral, gluteal, femoral, popliteal, sural, calcaneal."/>
           <p:cNvPicPr>
             <a:picLocks noChangeAspect="1"/>
           </p:cNvPicPr>
@@ -3385,8 +3381,8 @@
         </p:blipFill>
         <p:spPr>
           <a:xfrm>
-            <a:off x="6309360" y="1691640"/>
-            <a:ext cx="5120640" cy="2880360"/>
+            <a:off x="6172200" y="2516063"/>
+            <a:ext cx="5852160" cy="3288914"/>
           </a:xfrm>
           <a:prstGeom prst="rect">
             <a:avLst/>
@@ -3440,7 +3436,7 @@
           <a:lstStyle/>
           <a:p>
             <a:r>
-              <a:rPr sz="3000" b="1" i="0">
+              <a:rPr sz="2900" b="1" i="0">
                 <a:solidFill>
                   <a:srgbClr val="0B1530"/>
                 </a:solidFill>
@@ -3480,7 +3476,7 @@
                 </a:solidFill>
                 <a:latin typeface="Calibri"/>
               </a:rPr>
-              <a:t>HUMAN ANATOMY · FOUNDATIONS</a:t>
+              <a:t>FOCUS: HUMAN ANATOMY · FOUNDATIONS</a:t>
             </a:r>
           </a:p>
         </p:txBody>
@@ -3509,7 +3505,7 @@
           <a:p>
             <a:pPr>
               <a:lnSpc>
-                <a:spcPct val="106000"/>
+                <a:spcPct val="105000"/>
               </a:lnSpc>
               <a:spcAft>
                 <a:spcPts val="1200"/>
@@ -3537,7 +3533,7 @@
           <a:p>
             <a:pPr>
               <a:lnSpc>
-                <a:spcPct val="106000"/>
+                <a:spcPct val="105000"/>
               </a:lnSpc>
               <a:spcAft>
                 <a:spcPts val="1200"/>
@@ -3565,7 +3561,7 @@
           <a:p>
             <a:pPr>
               <a:lnSpc>
-                <a:spcPct val="106000"/>
+                <a:spcPct val="105000"/>
               </a:lnSpc>
               <a:spcAft>
                 <a:spcPts val="1200"/>
@@ -3587,7 +3583,7 @@
                 </a:solidFill>
                 <a:latin typeface="Calibri"/>
               </a:rPr>
-              <a:t>every regional term into one of these two buckets as you learn it.</a:t>
+              <a:t>every regional term into one of these two buckets.</a:t>
             </a:r>
           </a:p>
         </p:txBody>
@@ -3765,7 +3761,7 @@
           <a:lstStyle/>
           <a:p>
             <a:r>
-              <a:rPr sz="3000" b="1" i="0">
+              <a:rPr sz="2900" b="1" i="0">
                 <a:solidFill>
                   <a:srgbClr val="0B1530"/>
                 </a:solidFill>
@@ -3805,7 +3801,7 @@
                 </a:solidFill>
                 <a:latin typeface="Calibri"/>
               </a:rPr>
-              <a:t>HUMAN ANATOMY · FOUNDATIONS</a:t>
+              <a:t>FOCUS: HUMAN ANATOMY · FOUNDATIONS</a:t>
             </a:r>
           </a:p>
         </p:txBody>
@@ -3818,8 +3814,8 @@
         </p:nvSpPr>
         <p:spPr>
           <a:xfrm>
-            <a:off x="640080" y="1783080"/>
-            <a:ext cx="10972800" cy="4800600"/>
+            <a:off x="502920" y="1783080"/>
+            <a:ext cx="4526280" cy="4800600"/>
           </a:xfrm>
           <a:prstGeom prst="rect">
             <a:avLst/>
@@ -3834,14 +3830,14 @@
           <a:p>
             <a:pPr>
               <a:lnSpc>
-                <a:spcPct val="106000"/>
+                <a:spcPct val="105000"/>
               </a:lnSpc>
               <a:spcAft>
-                <a:spcPts val="1100"/>
+                <a:spcPts val="900"/>
               </a:spcAft>
             </a:pPr>
             <a:r>
-              <a:rPr sz="1800" b="1" i="0">
+              <a:rPr sz="1600" b="1" i="0">
                 <a:solidFill>
                   <a:srgbClr val="8B3A2E"/>
                 </a:solidFill>
@@ -3850,26 +3846,26 @@
               <a:t>Dorsal body cavity: </a:t>
             </a:r>
             <a:r>
-              <a:rPr sz="1800" b="0" i="0">
+              <a:rPr sz="1600" b="0" i="0">
                 <a:solidFill>
                   <a:srgbClr val="0B1530"/>
                 </a:solidFill>
                 <a:latin typeface="Calibri"/>
               </a:rPr>
-              <a:t>the cranial cavity (brain) and the vertebral cavity (spinal cord).</a:t>
+              <a:t>cranial cavity (brain) and vertebral cavity (spinal cord).</a:t>
             </a:r>
           </a:p>
           <a:p>
             <a:pPr>
               <a:lnSpc>
-                <a:spcPct val="106000"/>
+                <a:spcPct val="105000"/>
               </a:lnSpc>
               <a:spcAft>
-                <a:spcPts val="1100"/>
+                <a:spcPts val="900"/>
               </a:spcAft>
             </a:pPr>
             <a:r>
-              <a:rPr sz="1800" b="1" i="0">
+              <a:rPr sz="1600" b="1" i="0">
                 <a:solidFill>
                   <a:srgbClr val="8B3A2E"/>
                 </a:solidFill>
@@ -3878,54 +3874,54 @@
               <a:t>Ventral body cavity: </a:t>
             </a:r>
             <a:r>
-              <a:rPr sz="1800" b="0" i="0">
+              <a:rPr sz="1600" b="0" i="0">
                 <a:solidFill>
                   <a:srgbClr val="0B1530"/>
                 </a:solidFill>
                 <a:latin typeface="Calibri"/>
               </a:rPr>
-              <a:t>the thoracic cavity (heart and lungs) and the abdominopelvic cavity, separated by the diaphragm.</a:t>
+              <a:t>thoracic and abdominopelvic cavities, split by the diaphragm.</a:t>
             </a:r>
           </a:p>
           <a:p>
             <a:pPr>
               <a:lnSpc>
-                <a:spcPct val="106000"/>
+                <a:spcPct val="105000"/>
               </a:lnSpc>
               <a:spcAft>
-                <a:spcPts val="1100"/>
+                <a:spcPts val="900"/>
               </a:spcAft>
             </a:pPr>
             <a:r>
-              <a:rPr sz="1800" b="1" i="0">
+              <a:rPr sz="1600" b="1" i="0">
                 <a:solidFill>
                   <a:srgbClr val="8B3A2E"/>
                 </a:solidFill>
                 <a:latin typeface="Calibri"/>
               </a:rPr>
-              <a:t>Inside the thorax: </a:t>
-            </a:r>
-            <a:r>
-              <a:rPr sz="1800" b="0" i="0">
+              <a:t>Thorax: </a:t>
+            </a:r>
+            <a:r>
+              <a:rPr sz="1600" b="0" i="0">
                 <a:solidFill>
                   <a:srgbClr val="0B1530"/>
                 </a:solidFill>
                 <a:latin typeface="Calibri"/>
               </a:rPr>
-              <a:t>two pleural cavities (one per lung) and the mediastinum; the pericardial cavity (heart) sits within the mediastinum.</a:t>
+              <a:t>two pleural cavities plus the mediastinum; pericardial cavity (heart) within it.</a:t>
             </a:r>
           </a:p>
           <a:p>
             <a:pPr>
               <a:lnSpc>
-                <a:spcPct val="106000"/>
+                <a:spcPct val="105000"/>
               </a:lnSpc>
               <a:spcAft>
-                <a:spcPts val="1100"/>
+                <a:spcPts val="900"/>
               </a:spcAft>
             </a:pPr>
             <a:r>
-              <a:rPr sz="1800" b="1" i="0">
+              <a:rPr sz="1600" b="1" i="0">
                 <a:solidFill>
                   <a:srgbClr val="8B3A2E"/>
                 </a:solidFill>
@@ -3934,17 +3930,41 @@
               <a:t>Abdominopelvic: </a:t>
             </a:r>
             <a:r>
-              <a:rPr sz="1800" b="0" i="0">
+              <a:rPr sz="1600" b="0" i="0">
                 <a:solidFill>
                   <a:srgbClr val="0B1530"/>
                 </a:solidFill>
                 <a:latin typeface="Calibri"/>
               </a:rPr>
-              <a:t>the abdominal cavity (digestive viscera) above and the pelvic cavity (bladder, reproductive organs, rectum) below.</a:t>
-            </a:r>
-          </a:p>
-        </p:txBody>
-      </p:sp>
+              <a:t>abdominal cavity (digestive viscera) and pelvic cavity (bladder, reproductive, rectum).</a:t>
+            </a:r>
+          </a:p>
+        </p:txBody>
+      </p:sp>
+      <p:pic>
+        <p:nvPicPr>
+          <p:cNvPr id="5" name="Picture 4" descr="Organization chart of the body cavities: dorsal (cranial, vertebral) and ventral (thoracic with pleural cavities and mediastinum; abdominopelvic with abdominal and pelvic cavities)."/>
+          <p:cNvPicPr>
+            <a:picLocks noChangeAspect="1"/>
+          </p:cNvPicPr>
+          <p:nvPr/>
+        </p:nvPicPr>
+        <p:blipFill>
+          <a:blip r:embed="rId2"/>
+          <a:stretch>
+            <a:fillRect/>
+          </a:stretch>
+        </p:blipFill>
+        <p:spPr>
+          <a:xfrm>
+            <a:off x="5257800" y="1424077"/>
+            <a:ext cx="6446520" cy="5427164"/>
+          </a:xfrm>
+          <a:prstGeom prst="rect">
+            <a:avLst/>
+          </a:prstGeom>
+        </p:spPr>
+      </p:pic>
     </p:spTree>
   </p:cSld>
   <p:clrMapOvr>
@@ -3992,13 +4012,13 @@
           <a:lstStyle/>
           <a:p>
             <a:r>
-              <a:rPr sz="3000" b="1" i="0">
+              <a:rPr sz="2900" b="1" i="0">
                 <a:solidFill>
                   <a:srgbClr val="0B1530"/>
                 </a:solidFill>
                 <a:latin typeface="Calibri"/>
               </a:rPr>
-              <a:t>Body cavities at a glance</a:t>
+              <a:t>Abdominopelvic quadrants</a:t>
             </a:r>
           </a:p>
         </p:txBody>
@@ -4032,14 +4052,177 @@
                 </a:solidFill>
                 <a:latin typeface="Calibri"/>
               </a:rPr>
-              <a:t>HUMAN ANATOMY · FOUNDATIONS</a:t>
+              <a:t>FOCUS: HUMAN ANATOMY · FOUNDATIONS</a:t>
+            </a:r>
+          </a:p>
+        </p:txBody>
+      </p:sp>
+      <p:sp>
+        <p:nvSpPr>
+          <p:cNvPr id="4" name="TextBox 3"/>
+          <p:cNvSpPr txBox="1"/>
+          <p:nvPr/>
+        </p:nvSpPr>
+        <p:spPr>
+          <a:xfrm>
+            <a:off x="502920" y="1783080"/>
+            <a:ext cx="4526280" cy="4800600"/>
+          </a:xfrm>
+          <a:prstGeom prst="rect">
+            <a:avLst/>
+          </a:prstGeom>
+          <a:noFill/>
+        </p:spPr>
+        <p:txBody>
+          <a:bodyPr wrap="square" lIns="0" rIns="0" tIns="0" bIns="0">
+            <a:spAutoFit/>
+          </a:bodyPr>
+          <a:lstStyle/>
+          <a:p>
+            <a:pPr>
+              <a:lnSpc>
+                <a:spcPct val="105000"/>
+              </a:lnSpc>
+              <a:spcAft>
+                <a:spcPts val="700"/>
+              </a:spcAft>
+            </a:pPr>
+            <a:r>
+              <a:rPr sz="1500" b="1" i="0">
+                <a:solidFill>
+                  <a:srgbClr val="8B3A2E"/>
+                </a:solidFill>
+                <a:latin typeface="Calibri"/>
+              </a:rPr>
+              <a:t>Four quadrants </a:t>
+            </a:r>
+            <a:r>
+              <a:rPr sz="1500" b="0" i="0">
+                <a:solidFill>
+                  <a:srgbClr val="0B1530"/>
+                </a:solidFill>
+                <a:latin typeface="Calibri"/>
+              </a:rPr>
+              <a:t>through the navel: RUQ, LUQ, RLQ, LLQ. Where it hurts points to the organs there.</a:t>
+            </a:r>
+          </a:p>
+          <a:p>
+            <a:pPr>
+              <a:lnSpc>
+                <a:spcPct val="105000"/>
+              </a:lnSpc>
+              <a:spcAft>
+                <a:spcPts val="700"/>
+              </a:spcAft>
+            </a:pPr>
+            <a:r>
+              <a:rPr sz="1500" b="1" i="0">
+                <a:solidFill>
+                  <a:srgbClr val="8B3A2E"/>
+                </a:solidFill>
+                <a:latin typeface="Calibri"/>
+              </a:rPr>
+              <a:t>RUQ: </a:t>
+            </a:r>
+            <a:r>
+              <a:rPr sz="1500" b="0" i="0">
+                <a:solidFill>
+                  <a:srgbClr val="0B1530"/>
+                </a:solidFill>
+                <a:latin typeface="Calibri"/>
+              </a:rPr>
+              <a:t>liver, gallbladder, right kidney, head of pancreas.</a:t>
+            </a:r>
+          </a:p>
+          <a:p>
+            <a:pPr>
+              <a:lnSpc>
+                <a:spcPct val="105000"/>
+              </a:lnSpc>
+              <a:spcAft>
+                <a:spcPts val="700"/>
+              </a:spcAft>
+            </a:pPr>
+            <a:r>
+              <a:rPr sz="1500" b="1" i="0">
+                <a:solidFill>
+                  <a:srgbClr val="8B3A2E"/>
+                </a:solidFill>
+                <a:latin typeface="Calibri"/>
+              </a:rPr>
+              <a:t>LUQ: </a:t>
+            </a:r>
+            <a:r>
+              <a:rPr sz="1500" b="0" i="0">
+                <a:solidFill>
+                  <a:srgbClr val="0B1530"/>
+                </a:solidFill>
+                <a:latin typeface="Calibri"/>
+              </a:rPr>
+              <a:t>stomach, spleen, left kidney, tail of pancreas.</a:t>
+            </a:r>
+          </a:p>
+          <a:p>
+            <a:pPr>
+              <a:lnSpc>
+                <a:spcPct val="105000"/>
+              </a:lnSpc>
+              <a:spcAft>
+                <a:spcPts val="700"/>
+              </a:spcAft>
+            </a:pPr>
+            <a:r>
+              <a:rPr sz="1500" b="1" i="0">
+                <a:solidFill>
+                  <a:srgbClr val="8B3A2E"/>
+                </a:solidFill>
+                <a:latin typeface="Calibri"/>
+              </a:rPr>
+              <a:t>RLQ: </a:t>
+            </a:r>
+            <a:r>
+              <a:rPr sz="1500" b="0" i="0">
+                <a:solidFill>
+                  <a:srgbClr val="0B1530"/>
+                </a:solidFill>
+                <a:latin typeface="Calibri"/>
+              </a:rPr>
+              <a:t>appendix, cecum, right ovary and ureter.</a:t>
+            </a:r>
+          </a:p>
+          <a:p>
+            <a:pPr>
+              <a:lnSpc>
+                <a:spcPct val="105000"/>
+              </a:lnSpc>
+              <a:spcAft>
+                <a:spcPts val="700"/>
+              </a:spcAft>
+            </a:pPr>
+            <a:r>
+              <a:rPr sz="1500" b="1" i="0">
+                <a:solidFill>
+                  <a:srgbClr val="8B3A2E"/>
+                </a:solidFill>
+                <a:latin typeface="Calibri"/>
+              </a:rPr>
+              <a:t>LLQ: </a:t>
+            </a:r>
+            <a:r>
+              <a:rPr sz="1500" b="0" i="0">
+                <a:solidFill>
+                  <a:srgbClr val="0B1530"/>
+                </a:solidFill>
+                <a:latin typeface="Calibri"/>
+              </a:rPr>
+              <a:t>sigmoid and descending colon, left ovary and ureter.</a:t>
             </a:r>
           </a:p>
         </p:txBody>
       </p:sp>
       <p:pic>
         <p:nvPicPr>
-          <p:cNvPr id="4" name="Picture 3" descr="Organization chart of the body cavities. Dorsal body cavity: cranial cavity (brain) and vertebral cavity (spinal cord). Ventral body cavity: thoracic cavity (above the diaphragm), which contains the pleural cavities (lungs) and the mediastinum (heart in the pericardial cavity); and the abdominopelvic cavity (below the diaphragm), which contains the abdominal cavity (digestive viscera) and the pelvic cavity (bladder, reproductive organs, rectum)."/>
+          <p:cNvPr id="5" name="Picture 4" descr="Anterior view of the abdomen divided into four quadrants: RUQ, LUQ, RLQ, LLQ."/>
           <p:cNvPicPr>
             <a:picLocks noChangeAspect="1"/>
           </p:cNvPicPr>
@@ -4053,8 +4236,8 @@
         </p:blipFill>
         <p:spPr>
           <a:xfrm>
-            <a:off x="3310128" y="1508760"/>
-            <a:ext cx="5577840" cy="4695844"/>
+            <a:off x="5257800" y="2349047"/>
+            <a:ext cx="6446520" cy="3622944"/>
           </a:xfrm>
           <a:prstGeom prst="rect">
             <a:avLst/>
@@ -4108,13 +4291,13 @@
           <a:lstStyle/>
           <a:p>
             <a:r>
-              <a:rPr sz="3000" b="1" i="0">
+              <a:rPr sz="2900" b="1" i="0">
                 <a:solidFill>
                   <a:srgbClr val="0B1530"/>
                 </a:solidFill>
                 <a:latin typeface="Calibri"/>
               </a:rPr>
-              <a:t>Abdominopelvic quadrants</a:t>
+              <a:t>Abdominopelvic regions (nine)</a:t>
             </a:r>
           </a:p>
         </p:txBody>
@@ -4148,7 +4331,7 @@
                 </a:solidFill>
                 <a:latin typeface="Calibri"/>
               </a:rPr>
-              <a:t>HUMAN ANATOMY · FOUNDATIONS</a:t>
+              <a:t>FOCUS: HUMAN ANATOMY · FOUNDATIONS</a:t>
             </a:r>
           </a:p>
         </p:txBody>
@@ -4161,8 +4344,8 @@
         </p:nvSpPr>
         <p:spPr>
           <a:xfrm>
-            <a:off x="640080" y="1783080"/>
-            <a:ext cx="6035040" cy="4800600"/>
+            <a:off x="502920" y="1783080"/>
+            <a:ext cx="4526280" cy="4800600"/>
           </a:xfrm>
           <a:prstGeom prst="rect">
             <a:avLst/>
@@ -4177,92 +4360,120 @@
           <a:p>
             <a:pPr>
               <a:lnSpc>
-                <a:spcPct val="106000"/>
+                <a:spcPct val="105000"/>
               </a:lnSpc>
               <a:spcAft>
-                <a:spcPts val="1200"/>
+                <a:spcPts val="900"/>
               </a:spcAft>
             </a:pPr>
             <a:r>
-              <a:rPr sz="1800" b="1" i="0">
+              <a:rPr sz="1600" b="1" i="0">
                 <a:solidFill>
                   <a:srgbClr val="8B3A2E"/>
                 </a:solidFill>
                 <a:latin typeface="Calibri"/>
               </a:rPr>
-              <a:t>Four quadrants: </a:t>
-            </a:r>
-            <a:r>
-              <a:rPr sz="1800" b="0" i="0">
+              <a:t>Top row: </a:t>
+            </a:r>
+            <a:r>
+              <a:rPr sz="1600" b="0" i="0">
                 <a:solidFill>
                   <a:srgbClr val="0B1530"/>
                 </a:solidFill>
                 <a:latin typeface="Calibri"/>
               </a:rPr>
-              <a:t>two lines through the navel give RUQ, LUQ, RLQ, LLQ.</a:t>
+              <a:t>right hypochondriac, epigastric, left hypochondriac.</a:t>
             </a:r>
           </a:p>
           <a:p>
             <a:pPr>
               <a:lnSpc>
-                <a:spcPct val="106000"/>
+                <a:spcPct val="105000"/>
               </a:lnSpc>
               <a:spcAft>
-                <a:spcPts val="1200"/>
+                <a:spcPts val="900"/>
               </a:spcAft>
             </a:pPr>
             <a:r>
-              <a:rPr sz="1800" b="1" i="0">
+              <a:rPr sz="1600" b="1" i="0">
                 <a:solidFill>
                   <a:srgbClr val="8B3A2E"/>
                 </a:solidFill>
                 <a:latin typeface="Calibri"/>
               </a:rPr>
-              <a:t>Why: </a:t>
-            </a:r>
-            <a:r>
-              <a:rPr sz="1800" b="0" i="0">
+              <a:t>Middle row: </a:t>
+            </a:r>
+            <a:r>
+              <a:rPr sz="1600" b="0" i="0">
                 <a:solidFill>
                   <a:srgbClr val="0B1530"/>
                 </a:solidFill>
                 <a:latin typeface="Calibri"/>
               </a:rPr>
-              <a:t>the location of pain points toward the organs in that quadrant.</a:t>
+              <a:t>right lumbar, umbilical, left lumbar.</a:t>
             </a:r>
           </a:p>
           <a:p>
             <a:pPr>
               <a:lnSpc>
-                <a:spcPct val="106000"/>
+                <a:spcPct val="105000"/>
               </a:lnSpc>
               <a:spcAft>
-                <a:spcPts val="1200"/>
+                <a:spcPts val="900"/>
               </a:spcAft>
             </a:pPr>
             <a:r>
-              <a:rPr sz="1800" b="1" i="0">
+              <a:rPr sz="1600" b="1" i="0">
                 <a:solidFill>
                   <a:srgbClr val="8B3A2E"/>
                 </a:solidFill>
                 <a:latin typeface="Calibri"/>
               </a:rPr>
-              <a:t>Examples: </a:t>
-            </a:r>
-            <a:r>
-              <a:rPr sz="1800" b="0" i="0">
+              <a:t>Bottom row: </a:t>
+            </a:r>
+            <a:r>
+              <a:rPr sz="1600" b="0" i="0">
                 <a:solidFill>
                   <a:srgbClr val="0B1530"/>
                 </a:solidFill>
                 <a:latin typeface="Calibri"/>
               </a:rPr>
-              <a:t>RLQ pain raises the appendix; RUQ pain raises the gallbladder and liver.</a:t>
+              <a:t>right iliac (inguinal), hypogastric (pubic), left iliac (inguinal).</a:t>
+            </a:r>
+          </a:p>
+          <a:p>
+            <a:pPr>
+              <a:lnSpc>
+                <a:spcPct val="105000"/>
+              </a:lnSpc>
+              <a:spcAft>
+                <a:spcPts val="900"/>
+              </a:spcAft>
+            </a:pPr>
+            <a:r>
+              <a:rPr sz="1600" b="1" i="0">
+                <a:solidFill>
+                  <a:srgbClr val="8B3A2E"/>
+                </a:solidFill>
+                <a:latin typeface="Calibri"/>
+              </a:rPr>
+              <a:t>Use </a:t>
+            </a:r>
+            <a:r>
+              <a:rPr sz="1600" b="0" i="0">
+                <a:solidFill>
+                  <a:srgbClr val="0B1530"/>
+                </a:solidFill>
+                <a:latin typeface="Calibri"/>
+              </a:rPr>
+              <a:t>when you need to localize more tightly than a quadrant.</a:t>
             </a:r>
           </a:p>
         </p:txBody>
       </p:sp>
       <p:pic>
         <p:nvPicPr>
-          <p:cNvPr id="5" name="Picture 4" descr="Anterior view of the abdomen divided by a vertical and a horizontal line through the navel into four quadrants: right upper, left upper, right lower, left lower."/>
+          <p:cNvPr id="5" name="Picture 4" descr="Anterior view of the abdomen divided into nine regions: right and left hypochondriac, epigastric, right and left lumbar, umbilical, right and left iliac, and hypogastric."/>
           <p:cNvPicPr>
             <a:picLocks noChangeAspect="1"/>
           </p:cNvPicPr>
@@ -4276,8 +4487,8 @@
         </p:blipFill>
         <p:spPr>
           <a:xfrm>
-            <a:off x="6949440" y="1737360"/>
-            <a:ext cx="4754880" cy="2674620"/>
+            <a:off x="5257800" y="2349047"/>
+            <a:ext cx="6446520" cy="3622944"/>
           </a:xfrm>
           <a:prstGeom prst="rect">
             <a:avLst/>
@@ -4298,7 +4509,7 @@
     <p:bg>
       <p:bgPr>
         <a:solidFill>
-          <a:srgbClr val="FFFFFF"/>
+          <a:srgbClr val="0B1530"/>
         </a:solidFill>
         <a:effectLst/>
       </p:bgPr>
@@ -4322,22 +4533,22 @@
         </p:nvSpPr>
         <p:spPr>
           <a:xfrm>
-            <a:off x="640080" y="713232"/>
-            <a:ext cx="10972800" cy="822960"/>
-          </a:xfrm>
-        </p:spPr>
-        <p:txBody>
-          <a:bodyPr/>
-          <a:lstStyle/>
-          <a:p>
-            <a:r>
-              <a:rPr sz="3000" b="1" i="0">
-                <a:solidFill>
-                  <a:srgbClr val="0B1530"/>
-                </a:solidFill>
-                <a:latin typeface="Calibri"/>
-              </a:rPr>
-              <a:t>Key organs by quadrant</a:t>
+            <a:off x="822960" y="2286000"/>
+            <a:ext cx="10515600" cy="1463040"/>
+          </a:xfrm>
+        </p:spPr>
+        <p:txBody>
+          <a:bodyPr wrap="square"/>
+          <a:lstStyle/>
+          <a:p>
+            <a:r>
+              <a:rPr sz="4000" b="1" i="0">
+                <a:solidFill>
+                  <a:srgbClr val="FFFFFF"/>
+                </a:solidFill>
+                <a:latin typeface="Calibri"/>
+              </a:rPr>
+              <a:t>The Mediastinum</a:t>
             </a:r>
           </a:p>
         </p:txBody>
@@ -4350,8 +4561,8 @@
         </p:nvSpPr>
         <p:spPr>
           <a:xfrm>
-            <a:off x="640080" y="365760"/>
-            <a:ext cx="10972800" cy="365760"/>
+            <a:off x="822960" y="1828800"/>
+            <a:ext cx="10515600" cy="457200"/>
           </a:xfrm>
           <a:prstGeom prst="rect">
             <a:avLst/>
@@ -4365,13 +4576,13 @@
           <a:lstStyle/>
           <a:p>
             <a:r>
-              <a:rPr sz="1200" b="1" i="0">
-                <a:solidFill>
-                  <a:srgbClr val="8B3A2E"/>
-                </a:solidFill>
-                <a:latin typeface="Calibri"/>
-              </a:rPr>
-              <a:t>HUMAN ANATOMY · FOUNDATIONS</a:t>
+              <a:rPr sz="1500" b="1" i="0">
+                <a:solidFill>
+                  <a:srgbClr val="C9A14A"/>
+                </a:solidFill>
+                <a:latin typeface="Calibri"/>
+              </a:rPr>
+              <a:t>Part 4</a:t>
             </a:r>
           </a:p>
         </p:txBody>
@@ -4384,8 +4595,8 @@
         </p:nvSpPr>
         <p:spPr>
           <a:xfrm>
-            <a:off x="640080" y="1783080"/>
-            <a:ext cx="10972800" cy="4800600"/>
+            <a:off x="822960" y="4114800"/>
+            <a:ext cx="10332720" cy="1463040"/>
           </a:xfrm>
           <a:prstGeom prst="rect">
             <a:avLst/>
@@ -4398,115 +4609,14 @@
           </a:bodyPr>
           <a:lstStyle/>
           <a:p>
-            <a:pPr>
-              <a:lnSpc>
-                <a:spcPct val="106000"/>
-              </a:lnSpc>
-              <a:spcAft>
-                <a:spcPts val="1100"/>
-              </a:spcAft>
-            </a:pPr>
-            <a:r>
-              <a:rPr sz="1800" b="1" i="0">
-                <a:solidFill>
-                  <a:srgbClr val="8B3A2E"/>
-                </a:solidFill>
-                <a:latin typeface="Calibri"/>
-              </a:rPr>
-              <a:t>RUQ: </a:t>
-            </a:r>
             <a:r>
               <a:rPr sz="1800" b="0" i="0">
                 <a:solidFill>
-                  <a:srgbClr val="0B1530"/>
-                </a:solidFill>
-                <a:latin typeface="Calibri"/>
-              </a:rPr>
-              <a:t>liver, gallbladder, right kidney, head of pancreas, parts of stomach and intestine.</a:t>
-            </a:r>
-          </a:p>
-          <a:p>
-            <a:pPr>
-              <a:lnSpc>
-                <a:spcPct val="106000"/>
-              </a:lnSpc>
-              <a:spcAft>
-                <a:spcPts val="1100"/>
-              </a:spcAft>
-            </a:pPr>
-            <a:r>
-              <a:rPr sz="1800" b="1" i="0">
-                <a:solidFill>
-                  <a:srgbClr val="8B3A2E"/>
-                </a:solidFill>
-                <a:latin typeface="Calibri"/>
-              </a:rPr>
-              <a:t>LUQ: </a:t>
-            </a:r>
-            <a:r>
-              <a:rPr sz="1800" b="0" i="0">
-                <a:solidFill>
-                  <a:srgbClr val="0B1530"/>
-                </a:solidFill>
-                <a:latin typeface="Calibri"/>
-              </a:rPr>
-              <a:t>stomach, spleen, left kidney, body and tail of pancreas, parts of intestine.</a:t>
-            </a:r>
-          </a:p>
-          <a:p>
-            <a:pPr>
-              <a:lnSpc>
-                <a:spcPct val="106000"/>
-              </a:lnSpc>
-              <a:spcAft>
-                <a:spcPts val="1100"/>
-              </a:spcAft>
-            </a:pPr>
-            <a:r>
-              <a:rPr sz="1800" b="1" i="0">
-                <a:solidFill>
-                  <a:srgbClr val="8B3A2E"/>
-                </a:solidFill>
-                <a:latin typeface="Calibri"/>
-              </a:rPr>
-              <a:t>RLQ: </a:t>
-            </a:r>
-            <a:r>
-              <a:rPr sz="1800" b="0" i="0">
-                <a:solidFill>
-                  <a:srgbClr val="0B1530"/>
-                </a:solidFill>
-                <a:latin typeface="Calibri"/>
-              </a:rPr>
-              <a:t>appendix, cecum, ascending colon, right ovary and uterine tube, right ureter.</a:t>
-            </a:r>
-          </a:p>
-          <a:p>
-            <a:pPr>
-              <a:lnSpc>
-                <a:spcPct val="106000"/>
-              </a:lnSpc>
-              <a:spcAft>
-                <a:spcPts val="1100"/>
-              </a:spcAft>
-            </a:pPr>
-            <a:r>
-              <a:rPr sz="1800" b="1" i="0">
-                <a:solidFill>
-                  <a:srgbClr val="8B3A2E"/>
-                </a:solidFill>
-                <a:latin typeface="Calibri"/>
-              </a:rPr>
-              <a:t>LLQ: </a:t>
-            </a:r>
-            <a:r>
-              <a:rPr sz="1800" b="0" i="0">
-                <a:solidFill>
-                  <a:srgbClr val="0B1530"/>
-                </a:solidFill>
-                <a:latin typeface="Calibri"/>
-              </a:rPr>
-              <a:t>sigmoid and descending colon, left ovary and uterine tube, left ureter.</a:t>
+                  <a:srgbClr val="E6EAF0"/>
+                </a:solidFill>
+                <a:latin typeface="Calibri"/>
+              </a:rPr>
+              <a:t>The central compartment of the thorax, between the two lungs.</a:t>
             </a:r>
           </a:p>
         </p:txBody>
@@ -4558,13 +4668,13 @@
           <a:lstStyle/>
           <a:p>
             <a:r>
-              <a:rPr sz="3000" b="1" i="0">
+              <a:rPr sz="2900" b="1" i="0">
                 <a:solidFill>
                   <a:srgbClr val="0B1530"/>
                 </a:solidFill>
                 <a:latin typeface="Calibri"/>
               </a:rPr>
-              <a:t>Nine abdominopelvic regions</a:t>
+              <a:t>Borders and contents of the mediastinum</a:t>
             </a:r>
           </a:p>
         </p:txBody>
@@ -4598,7 +4708,7 @@
                 </a:solidFill>
                 <a:latin typeface="Calibri"/>
               </a:rPr>
-              <a:t>HUMAN ANATOMY · FOUNDATIONS</a:t>
+              <a:t>FOCUS: HUMAN ANATOMY · FOUNDATIONS</a:t>
             </a:r>
           </a:p>
         </p:txBody>
@@ -4611,8 +4721,8 @@
         </p:nvSpPr>
         <p:spPr>
           <a:xfrm>
-            <a:off x="640080" y="1783080"/>
-            <a:ext cx="10972800" cy="4800600"/>
+            <a:off x="502920" y="1783080"/>
+            <a:ext cx="4526280" cy="4800600"/>
           </a:xfrm>
           <a:prstGeom prst="rect">
             <a:avLst/>
@@ -4627,117 +4737,169 @@
           <a:p>
             <a:pPr>
               <a:lnSpc>
-                <a:spcPct val="106000"/>
+                <a:spcPct val="105000"/>
               </a:lnSpc>
               <a:spcAft>
-                <a:spcPts val="1200"/>
+                <a:spcPts val="700"/>
               </a:spcAft>
             </a:pPr>
             <a:r>
-              <a:rPr sz="1800" b="1" i="0">
+              <a:rPr sz="1500" b="1" i="0">
                 <a:solidFill>
                   <a:srgbClr val="8B3A2E"/>
                 </a:solidFill>
                 <a:latin typeface="Calibri"/>
               </a:rPr>
-              <a:t>Top row: </a:t>
-            </a:r>
-            <a:r>
-              <a:rPr sz="1800" b="0" i="0">
+              <a:t>Superior: </a:t>
+            </a:r>
+            <a:r>
+              <a:rPr sz="1500" b="0" i="0">
                 <a:solidFill>
                   <a:srgbClr val="0B1530"/>
                 </a:solidFill>
                 <a:latin typeface="Calibri"/>
               </a:rPr>
-              <a:t>right hypochondriac, epigastric, left hypochondriac.</a:t>
+              <a:t>the thoracic inlet, at the level of the first rib.</a:t>
             </a:r>
           </a:p>
           <a:p>
             <a:pPr>
               <a:lnSpc>
-                <a:spcPct val="106000"/>
+                <a:spcPct val="105000"/>
               </a:lnSpc>
               <a:spcAft>
-                <a:spcPts val="1200"/>
+                <a:spcPts val="700"/>
               </a:spcAft>
             </a:pPr>
             <a:r>
-              <a:rPr sz="1800" b="1" i="0">
+              <a:rPr sz="1500" b="1" i="0">
                 <a:solidFill>
                   <a:srgbClr val="8B3A2E"/>
                 </a:solidFill>
                 <a:latin typeface="Calibri"/>
               </a:rPr>
-              <a:t>Middle row: </a:t>
-            </a:r>
-            <a:r>
-              <a:rPr sz="1800" b="0" i="0">
+              <a:t>Inferior: </a:t>
+            </a:r>
+            <a:r>
+              <a:rPr sz="1500" b="0" i="0">
                 <a:solidFill>
                   <a:srgbClr val="0B1530"/>
                 </a:solidFill>
                 <a:latin typeface="Calibri"/>
               </a:rPr>
-              <a:t>right lumbar, umbilical, left lumbar.</a:t>
+              <a:t>the diaphragm.</a:t>
             </a:r>
           </a:p>
           <a:p>
             <a:pPr>
               <a:lnSpc>
-                <a:spcPct val="106000"/>
+                <a:spcPct val="105000"/>
               </a:lnSpc>
               <a:spcAft>
-                <a:spcPts val="1200"/>
+                <a:spcPts val="700"/>
               </a:spcAft>
             </a:pPr>
             <a:r>
-              <a:rPr sz="1800" b="1" i="0">
+              <a:rPr sz="1500" b="1" i="0">
                 <a:solidFill>
                   <a:srgbClr val="8B3A2E"/>
                 </a:solidFill>
                 <a:latin typeface="Calibri"/>
               </a:rPr>
-              <a:t>Bottom row: </a:t>
-            </a:r>
-            <a:r>
-              <a:rPr sz="1800" b="0" i="0">
+              <a:t>Anterior: </a:t>
+            </a:r>
+            <a:r>
+              <a:rPr sz="1500" b="0" i="0">
                 <a:solidFill>
                   <a:srgbClr val="0B1530"/>
                 </a:solidFill>
                 <a:latin typeface="Calibri"/>
               </a:rPr>
-              <a:t>right iliac (inguinal), hypogastric (pubic), left iliac (inguinal).</a:t>
+              <a:t>the sternum.  Posterior: the vertebral column.</a:t>
             </a:r>
           </a:p>
           <a:p>
             <a:pPr>
               <a:lnSpc>
-                <a:spcPct val="106000"/>
+                <a:spcPct val="105000"/>
               </a:lnSpc>
               <a:spcAft>
-                <a:spcPts val="1200"/>
+                <a:spcPts val="700"/>
               </a:spcAft>
             </a:pPr>
             <a:r>
-              <a:rPr sz="1800" b="1" i="0">
+              <a:rPr sz="1500" b="1" i="0">
                 <a:solidFill>
                   <a:srgbClr val="8B3A2E"/>
                 </a:solidFill>
                 <a:latin typeface="Calibri"/>
               </a:rPr>
-              <a:t>Use </a:t>
-            </a:r>
-            <a:r>
-              <a:rPr sz="1800" b="0" i="0">
+              <a:t>Lateral: </a:t>
+            </a:r>
+            <a:r>
+              <a:rPr sz="1500" b="0" i="0">
                 <a:solidFill>
                   <a:srgbClr val="0B1530"/>
                 </a:solidFill>
                 <a:latin typeface="Calibri"/>
               </a:rPr>
-              <a:t>the nine regions when you need to localize more tightly than a quadrant.</a:t>
-            </a:r>
-          </a:p>
-        </p:txBody>
-      </p:sp>
+              <a:t>the mediastinal pleura, a lung on each side.</a:t>
+            </a:r>
+          </a:p>
+          <a:p>
+            <a:pPr>
+              <a:lnSpc>
+                <a:spcPct val="105000"/>
+              </a:lnSpc>
+              <a:spcAft>
+                <a:spcPts val="700"/>
+              </a:spcAft>
+            </a:pPr>
+            <a:r>
+              <a:rPr sz="1500" b="1" i="0">
+                <a:solidFill>
+                  <a:srgbClr val="8B3A2E"/>
+                </a:solidFill>
+                <a:latin typeface="Calibri"/>
+              </a:rPr>
+              <a:t>Contents: </a:t>
+            </a:r>
+            <a:r>
+              <a:rPr sz="1500" b="0" i="0">
+                <a:solidFill>
+                  <a:srgbClr val="0B1530"/>
+                </a:solidFill>
+                <a:latin typeface="Calibri"/>
+              </a:rPr>
+              <a:t>heart (in its pericardium), great vessels, trachea, esophagus, thymus, phrenic and vagus nerves, thoracic duct, lymph nodes.</a:t>
+            </a:r>
+          </a:p>
+        </p:txBody>
+      </p:sp>
+      <p:pic>
+        <p:nvPicPr>
+          <p:cNvPr id="5" name="Picture 4" descr="Cadaver dissection of the thorax with the mediastinum highlighted, the central compartment between the lungs holding the heart and great vessels. Adapted from BlueLink Anatomy, University of Michigan."/>
+          <p:cNvPicPr>
+            <a:picLocks noChangeAspect="1"/>
+          </p:cNvPicPr>
+          <p:nvPr/>
+        </p:nvPicPr>
+        <p:blipFill>
+          <a:blip r:embed="rId2"/>
+          <a:stretch>
+            <a:fillRect/>
+          </a:stretch>
+        </p:blipFill>
+        <p:spPr>
+          <a:xfrm>
+            <a:off x="5257800" y="2349047"/>
+            <a:ext cx="6446520" cy="3622944"/>
+          </a:xfrm>
+          <a:prstGeom prst="rect">
+            <a:avLst/>
+          </a:prstGeom>
+        </p:spPr>
+      </p:pic>
     </p:spTree>
   </p:cSld>
   <p:clrMapOvr>
@@ -4791,7 +4953,7 @@
                 </a:solidFill>
                 <a:latin typeface="Calibri"/>
               </a:rPr>
-              <a:t>The Mediastinum</a:t>
+              <a:t>The Retroperitoneum</a:t>
             </a:r>
           </a:p>
         </p:txBody>
@@ -4825,7 +4987,7 @@
                 </a:solidFill>
                 <a:latin typeface="Calibri"/>
               </a:rPr>
-              <a:t>Part 4</a:t>
+              <a:t>Part 5</a:t>
             </a:r>
           </a:p>
         </p:txBody>
@@ -4859,7 +5021,7 @@
                 </a:solidFill>
                 <a:latin typeface="Calibri"/>
               </a:rPr>
-              <a:t>The central compartment of the thorax, between the two lungs.</a:t>
+              <a:t>Some organs sit behind the lining of the abdominal cavity rather than inside it.</a:t>
             </a:r>
           </a:p>
         </p:txBody>
@@ -4911,13 +5073,13 @@
           <a:lstStyle/>
           <a:p>
             <a:r>
-              <a:rPr sz="3000" b="1" i="0">
+              <a:rPr sz="2900" b="1" i="0">
                 <a:solidFill>
                   <a:srgbClr val="0B1530"/>
                 </a:solidFill>
                 <a:latin typeface="Calibri"/>
               </a:rPr>
-              <a:t>What sits in the mediastinum</a:t>
+              <a:t>Behind the peritoneum</a:t>
             </a:r>
           </a:p>
         </p:txBody>
@@ -4951,7 +5113,7 @@
                 </a:solidFill>
                 <a:latin typeface="Calibri"/>
               </a:rPr>
-              <a:t>HUMAN ANATOMY · FOUNDATIONS</a:t>
+              <a:t>FOCUS: HUMAN ANATOMY · FOUNDATIONS</a:t>
             </a:r>
           </a:p>
         </p:txBody>
@@ -4964,8 +5126,8 @@
         </p:nvSpPr>
         <p:spPr>
           <a:xfrm>
-            <a:off x="640080" y="1783080"/>
-            <a:ext cx="10972800" cy="4800600"/>
+            <a:off x="502920" y="1783080"/>
+            <a:ext cx="4526280" cy="4800600"/>
           </a:xfrm>
           <a:prstGeom prst="rect">
             <a:avLst/>
@@ -4980,117 +5142,141 @@
           <a:p>
             <a:pPr>
               <a:lnSpc>
-                <a:spcPct val="106000"/>
+                <a:spcPct val="105000"/>
               </a:lnSpc>
               <a:spcAft>
-                <a:spcPts val="1200"/>
+                <a:spcPts val="700"/>
               </a:spcAft>
             </a:pPr>
             <a:r>
-              <a:rPr sz="1900" b="1" i="0">
+              <a:rPr sz="1500" b="1" i="0">
                 <a:solidFill>
                   <a:srgbClr val="8B3A2E"/>
                 </a:solidFill>
                 <a:latin typeface="Calibri"/>
               </a:rPr>
-              <a:t>Location: </a:t>
-            </a:r>
-            <a:r>
-              <a:rPr sz="1900" b="0" i="0">
+              <a:t>Definition: </a:t>
+            </a:r>
+            <a:r>
+              <a:rPr sz="1500" b="0" i="0">
                 <a:solidFill>
                   <a:srgbClr val="0B1530"/>
                 </a:solidFill>
                 <a:latin typeface="Calibri"/>
               </a:rPr>
-              <a:t>between the two pleural cavities, from sternum to vertebral column.</a:t>
+              <a:t>the space behind the parietal peritoneum, against the posterior wall.</a:t>
             </a:r>
           </a:p>
           <a:p>
             <a:pPr>
               <a:lnSpc>
-                <a:spcPct val="106000"/>
+                <a:spcPct val="105000"/>
               </a:lnSpc>
               <a:spcAft>
-                <a:spcPts val="1200"/>
+                <a:spcPts val="700"/>
               </a:spcAft>
             </a:pPr>
             <a:r>
-              <a:rPr sz="1900" b="1" i="0">
+              <a:rPr sz="1500" b="1" i="0">
                 <a:solidFill>
                   <a:srgbClr val="8B3A2E"/>
                 </a:solidFill>
                 <a:latin typeface="Calibri"/>
               </a:rPr>
-              <a:t>Contents: </a:t>
-            </a:r>
-            <a:r>
-              <a:rPr sz="1900" b="0" i="0">
+              <a:t>Intraperitoneal: </a:t>
+            </a:r>
+            <a:r>
+              <a:rPr sz="1500" b="0" i="0">
                 <a:solidFill>
                   <a:srgbClr val="0B1530"/>
                 </a:solidFill>
                 <a:latin typeface="Calibri"/>
               </a:rPr>
-              <a:t>the heart (in its pericardial sac), the great vessels, the trachea and esophagus, the thymus, and major nerves.</a:t>
+              <a:t>organs wrapped in peritoneum inside the cavity (stomach, most small intestine, liver, spleen).</a:t>
             </a:r>
           </a:p>
           <a:p>
             <a:pPr>
               <a:lnSpc>
-                <a:spcPct val="106000"/>
+                <a:spcPct val="105000"/>
               </a:lnSpc>
               <a:spcAft>
-                <a:spcPts val="1200"/>
+                <a:spcPts val="700"/>
               </a:spcAft>
             </a:pPr>
             <a:r>
-              <a:rPr sz="1900" b="1" i="0">
+              <a:rPr sz="1500" b="1" i="0">
                 <a:solidFill>
                   <a:srgbClr val="8B3A2E"/>
                 </a:solidFill>
                 <a:latin typeface="Calibri"/>
               </a:rPr>
-              <a:t>Not the lungs: </a:t>
-            </a:r>
-            <a:r>
-              <a:rPr sz="1900" b="0" i="0">
+              <a:t>Retroperitoneal: </a:t>
+            </a:r>
+            <a:r>
+              <a:rPr sz="1500" b="0" i="0">
                 <a:solidFill>
                   <a:srgbClr val="0B1530"/>
                 </a:solidFill>
                 <a:latin typeface="Calibri"/>
               </a:rPr>
-              <a:t>the lungs sit in the pleural cavities on either side.</a:t>
+              <a:t>organs behind it, covered by peritoneum only in front.</a:t>
             </a:r>
           </a:p>
           <a:p>
             <a:pPr>
               <a:lnSpc>
-                <a:spcPct val="106000"/>
+                <a:spcPct val="105000"/>
               </a:lnSpc>
               <a:spcAft>
-                <a:spcPts val="1200"/>
+                <a:spcPts val="700"/>
               </a:spcAft>
             </a:pPr>
             <a:r>
-              <a:rPr sz="1900" b="1" i="0">
+              <a:rPr sz="1500" b="1" i="0">
                 <a:solidFill>
                   <a:srgbClr val="8B3A2E"/>
                 </a:solidFill>
                 <a:latin typeface="Calibri"/>
               </a:rPr>
-              <a:t>Clinical: </a:t>
-            </a:r>
-            <a:r>
-              <a:rPr sz="1900" b="0" i="0">
+              <a:t>SAD PUCKER: </a:t>
+            </a:r>
+            <a:r>
+              <a:rPr sz="1500" b="0" i="0">
                 <a:solidFill>
                   <a:srgbClr val="0B1530"/>
                 </a:solidFill>
                 <a:latin typeface="Calibri"/>
               </a:rPr>
-              <a:t>a widened mediastinum on an X-ray is a red flag (for example, aortic injury).</a:t>
-            </a:r>
-          </a:p>
-        </p:txBody>
-      </p:sp>
+              <a:t>Suprarenal, Aorta/IVC, Duodenum, Pancreas, Ureters, Colon (asc/desc), Kidneys, Esophagus, Rectum.</a:t>
+            </a:r>
+          </a:p>
+        </p:txBody>
+      </p:sp>
+      <p:pic>
+        <p:nvPicPr>
+          <p:cNvPr id="5" name="Picture 4" descr="Cross-section of the abdomen showing the peritoneal cavity with an intraperitoneal organ in front and retroperitoneal organs (SAD PUCKER) behind it against the posterior wall."/>
+          <p:cNvPicPr>
+            <a:picLocks noChangeAspect="1"/>
+          </p:cNvPicPr>
+          <p:nvPr/>
+        </p:nvPicPr>
+        <p:blipFill>
+          <a:blip r:embed="rId2"/>
+          <a:stretch>
+            <a:fillRect/>
+          </a:stretch>
+        </p:blipFill>
+        <p:spPr>
+          <a:xfrm>
+            <a:off x="5257800" y="1843801"/>
+            <a:ext cx="6446520" cy="4633436"/>
+          </a:xfrm>
+          <a:prstGeom prst="rect">
+            <a:avLst/>
+          </a:prstGeom>
+        </p:spPr>
+      </p:pic>
     </p:spTree>
   </p:cSld>
   <p:clrMapOvr>
@@ -5270,7 +5456,7 @@
                 </a:solidFill>
                 <a:latin typeface="Calibri"/>
               </a:rPr>
-              <a:t>The Retroperitoneum</a:t>
+              <a:t>Membranes: Mucous and Serous</a:t>
             </a:r>
           </a:p>
         </p:txBody>
@@ -5304,7 +5490,7 @@
                 </a:solidFill>
                 <a:latin typeface="Calibri"/>
               </a:rPr>
-              <a:t>Part 5</a:t>
+              <a:t>Part 6</a:t>
             </a:r>
           </a:p>
         </p:txBody>
@@ -5338,7 +5524,7 @@
                 </a:solidFill>
                 <a:latin typeface="Calibri"/>
               </a:rPr>
-              <a:t>Some organs sit behind the lining of the abdominal cavity rather than inside it.</a:t>
+              <a:t>Serous membranes wrap the heart, lungs, and abdominal organs.</a:t>
             </a:r>
           </a:p>
         </p:txBody>
@@ -5390,13 +5576,13 @@
           <a:lstStyle/>
           <a:p>
             <a:r>
-              <a:rPr sz="3000" b="1" i="0">
+              <a:rPr sz="2900" b="1" i="0">
                 <a:solidFill>
                   <a:srgbClr val="0B1530"/>
                 </a:solidFill>
                 <a:latin typeface="Calibri"/>
               </a:rPr>
-              <a:t>Behind the peritoneum</a:t>
+              <a:t>Two membrane types to separate</a:t>
             </a:r>
           </a:p>
         </p:txBody>
@@ -5430,7 +5616,7 @@
                 </a:solidFill>
                 <a:latin typeface="Calibri"/>
               </a:rPr>
-              <a:t>HUMAN ANATOMY · FOUNDATIONS</a:t>
+              <a:t>FOCUS: HUMAN ANATOMY · FOUNDATIONS</a:t>
             </a:r>
           </a:p>
         </p:txBody>
@@ -5443,8 +5629,8 @@
         </p:nvSpPr>
         <p:spPr>
           <a:xfrm>
-            <a:off x="640080" y="1783080"/>
-            <a:ext cx="10972800" cy="4800600"/>
+            <a:off x="502920" y="1783080"/>
+            <a:ext cx="4526280" cy="4800600"/>
           </a:xfrm>
           <a:prstGeom prst="rect">
             <a:avLst/>
@@ -5459,10 +5645,10 @@
           <a:p>
             <a:pPr>
               <a:lnSpc>
-                <a:spcPct val="106000"/>
+                <a:spcPct val="105000"/>
               </a:lnSpc>
               <a:spcAft>
-                <a:spcPts val="900"/>
+                <a:spcPts val="1000"/>
               </a:spcAft>
             </a:pPr>
             <a:r>
@@ -5472,7 +5658,7 @@
                 </a:solidFill>
                 <a:latin typeface="Calibri"/>
               </a:rPr>
-              <a:t>Definition: </a:t>
+              <a:t>Mucous membranes </a:t>
             </a:r>
             <a:r>
               <a:rPr sz="1700" b="0" i="0">
@@ -5481,16 +5667,16 @@
                 </a:solidFill>
                 <a:latin typeface="Calibri"/>
               </a:rPr>
-              <a:t>the space behind the parietal peritoneum, against the posterior abdominal wall.</a:t>
+              <a:t>line cavities open to the outside; they secrete mucus.</a:t>
             </a:r>
           </a:p>
           <a:p>
             <a:pPr>
               <a:lnSpc>
-                <a:spcPct val="106000"/>
+                <a:spcPct val="105000"/>
               </a:lnSpc>
               <a:spcAft>
-                <a:spcPts val="900"/>
+                <a:spcPts val="1000"/>
               </a:spcAft>
             </a:pPr>
             <a:r>
@@ -5500,7 +5686,7 @@
                 </a:solidFill>
                 <a:latin typeface="Calibri"/>
               </a:rPr>
-              <a:t>Intraperitoneal: </a:t>
+              <a:t>Serous membranes </a:t>
             </a:r>
             <a:r>
               <a:rPr sz="1700" b="0" i="0">
@@ -5509,16 +5695,16 @@
                 </a:solidFill>
                 <a:latin typeface="Calibri"/>
               </a:rPr>
-              <a:t>organs hang inside the cavity, wrapped in peritoneum (stomach, most small intestine, liver, spleen).</a:t>
+              <a:t>line closed cavities and cover the organs; they secrete serous fluid.</a:t>
             </a:r>
           </a:p>
           <a:p>
             <a:pPr>
               <a:lnSpc>
-                <a:spcPct val="106000"/>
+                <a:spcPct val="105000"/>
               </a:lnSpc>
               <a:spcAft>
-                <a:spcPts val="900"/>
+                <a:spcPts val="1000"/>
               </a:spcAft>
             </a:pPr>
             <a:r>
@@ -5528,7 +5714,7 @@
                 </a:solidFill>
                 <a:latin typeface="Calibri"/>
               </a:rPr>
-              <a:t>Retroperitoneal: </a:t>
+              <a:t>Two layers: </a:t>
             </a:r>
             <a:r>
               <a:rPr sz="1700" b="0" i="0">
@@ -5537,67 +5723,35 @@
                 </a:solidFill>
                 <a:latin typeface="Calibri"/>
               </a:rPr>
-              <a:t>organs sit behind it, covered by peritoneum only on their anterior surface.</a:t>
-            </a:r>
-          </a:p>
-          <a:p>
-            <a:pPr>
-              <a:lnSpc>
-                <a:spcPct val="106000"/>
-              </a:lnSpc>
-              <a:spcAft>
-                <a:spcPts val="900"/>
-              </a:spcAft>
-            </a:pPr>
-            <a:r>
-              <a:rPr sz="1700" b="1" i="0">
-                <a:solidFill>
-                  <a:srgbClr val="8B3A2E"/>
-                </a:solidFill>
-                <a:latin typeface="Calibri"/>
-              </a:rPr>
-              <a:t>SAD PUCKER: </a:t>
-            </a:r>
-            <a:r>
-              <a:rPr sz="1700" b="0" i="0">
-                <a:solidFill>
-                  <a:srgbClr val="0B1530"/>
-                </a:solidFill>
-                <a:latin typeface="Calibri"/>
-              </a:rPr>
-              <a:t>Suprarenal glands, Aorta and IVC, Duodenum, Pancreas (except tail), Ureters, Colon (ascending and descending), Kidneys, Esophagus, Rectum.</a:t>
-            </a:r>
-          </a:p>
-          <a:p>
-            <a:pPr>
-              <a:lnSpc>
-                <a:spcPct val="106000"/>
-              </a:lnSpc>
-              <a:spcAft>
-                <a:spcPts val="900"/>
-              </a:spcAft>
-            </a:pPr>
-            <a:r>
-              <a:rPr sz="1700" b="1" i="0">
-                <a:solidFill>
-                  <a:srgbClr val="8B3A2E"/>
-                </a:solidFill>
-                <a:latin typeface="Calibri"/>
-              </a:rPr>
-              <a:t>Why it matters: </a:t>
-            </a:r>
-            <a:r>
-              <a:rPr sz="1700" b="0" i="0">
-                <a:solidFill>
-                  <a:srgbClr val="0B1530"/>
-                </a:solidFill>
-                <a:latin typeface="Calibri"/>
-              </a:rPr>
-              <a:t>reached without entering the peritoneal cavity.</a:t>
-            </a:r>
-          </a:p>
-        </p:txBody>
-      </p:sp>
+              <a:t>parietal (lines the wall) and visceral (covers the organ), with a fluid-filled serous cavity between.</a:t>
+            </a:r>
+          </a:p>
+        </p:txBody>
+      </p:sp>
+      <p:pic>
+        <p:nvPicPr>
+          <p:cNvPr id="5" name="Picture 4" descr="Schematic of a serous membrane: an organ wrapped by the visceral layer, a serous cavity with fluid, and the outer parietal layer lining the cavity wall."/>
+          <p:cNvPicPr>
+            <a:picLocks noChangeAspect="1"/>
+          </p:cNvPicPr>
+          <p:nvPr/>
+        </p:nvPicPr>
+        <p:blipFill>
+          <a:blip r:embed="rId2"/>
+          <a:stretch>
+            <a:fillRect/>
+          </a:stretch>
+        </p:blipFill>
+        <p:spPr>
+          <a:xfrm>
+            <a:off x="5257800" y="2383697"/>
+            <a:ext cx="6446520" cy="3553644"/>
+          </a:xfrm>
+          <a:prstGeom prst="rect">
+            <a:avLst/>
+          </a:prstGeom>
+        </p:spPr>
+      </p:pic>
     </p:spTree>
   </p:cSld>
   <p:clrMapOvr>
@@ -5645,13 +5799,13 @@
           <a:lstStyle/>
           <a:p>
             <a:r>
-              <a:rPr sz="3000" b="1" i="0">
+              <a:rPr sz="2900" b="1" i="0">
                 <a:solidFill>
                   <a:srgbClr val="0B1530"/>
                 </a:solidFill>
                 <a:latin typeface="Calibri"/>
               </a:rPr>
-              <a:t>Intraperitoneal vs retroperitoneal</a:t>
+              <a:t>Pleura: around the lungs</a:t>
             </a:r>
           </a:p>
         </p:txBody>
@@ -5685,14 +5839,121 @@
                 </a:solidFill>
                 <a:latin typeface="Calibri"/>
               </a:rPr>
-              <a:t>HUMAN ANATOMY · FOUNDATIONS</a:t>
+              <a:t>FOCUS: HUMAN ANATOMY · FOUNDATIONS</a:t>
+            </a:r>
+          </a:p>
+        </p:txBody>
+      </p:sp>
+      <p:sp>
+        <p:nvSpPr>
+          <p:cNvPr id="4" name="TextBox 3"/>
+          <p:cNvSpPr txBox="1"/>
+          <p:nvPr/>
+        </p:nvSpPr>
+        <p:spPr>
+          <a:xfrm>
+            <a:off x="502920" y="1783080"/>
+            <a:ext cx="4526280" cy="4800600"/>
+          </a:xfrm>
+          <a:prstGeom prst="rect">
+            <a:avLst/>
+          </a:prstGeom>
+          <a:noFill/>
+        </p:spPr>
+        <p:txBody>
+          <a:bodyPr wrap="square" lIns="0" rIns="0" tIns="0" bIns="0">
+            <a:spAutoFit/>
+          </a:bodyPr>
+          <a:lstStyle/>
+          <a:p>
+            <a:pPr>
+              <a:lnSpc>
+                <a:spcPct val="105000"/>
+              </a:lnSpc>
+              <a:spcAft>
+                <a:spcPts val="1100"/>
+              </a:spcAft>
+            </a:pPr>
+            <a:r>
+              <a:rPr sz="1700" b="1" i="0">
+                <a:solidFill>
+                  <a:srgbClr val="8B3A2E"/>
+                </a:solidFill>
+                <a:latin typeface="Calibri"/>
+              </a:rPr>
+              <a:t>Parietal pleura </a:t>
+            </a:r>
+            <a:r>
+              <a:rPr sz="1700" b="0" i="0">
+                <a:solidFill>
+                  <a:srgbClr val="0B1530"/>
+                </a:solidFill>
+                <a:latin typeface="Calibri"/>
+              </a:rPr>
+              <a:t>lines the thoracic wall; visceral pleura covers the lung.</a:t>
+            </a:r>
+          </a:p>
+          <a:p>
+            <a:pPr>
+              <a:lnSpc>
+                <a:spcPct val="105000"/>
+              </a:lnSpc>
+              <a:spcAft>
+                <a:spcPts val="1100"/>
+              </a:spcAft>
+            </a:pPr>
+            <a:r>
+              <a:rPr sz="1700" b="1" i="0">
+                <a:solidFill>
+                  <a:srgbClr val="8B3A2E"/>
+                </a:solidFill>
+                <a:latin typeface="Calibri"/>
+              </a:rPr>
+              <a:t>Between them </a:t>
+            </a:r>
+            <a:r>
+              <a:rPr sz="1700" b="0" i="0">
+                <a:solidFill>
+                  <a:srgbClr val="0B1530"/>
+                </a:solidFill>
+                <a:latin typeface="Calibri"/>
+              </a:rPr>
+              <a:t>is the pleural cavity with pleural fluid.</a:t>
+            </a:r>
+          </a:p>
+          <a:p>
+            <a:pPr>
+              <a:lnSpc>
+                <a:spcPct val="105000"/>
+              </a:lnSpc>
+              <a:spcAft>
+                <a:spcPts val="1100"/>
+              </a:spcAft>
+            </a:pPr>
+            <a:r>
+              <a:rPr sz="1700" b="1" i="0">
+                <a:solidFill>
+                  <a:srgbClr val="8B3A2E"/>
+                </a:solidFill>
+                <a:latin typeface="Calibri"/>
+              </a:rPr>
+              <a:t>Inflammation </a:t>
+            </a:r>
+            <a:r>
+              <a:rPr sz="1700" b="0" i="0">
+                <a:solidFill>
+                  <a:srgbClr val="0B1530"/>
+                </a:solidFill>
+                <a:latin typeface="Calibri"/>
+              </a:rPr>
+              <a:t>is pleuritis; air in the cavity is a pneumothorax.</a:t>
             </a:r>
           </a:p>
         </p:txBody>
       </p:sp>
       <p:pic>
         <p:nvPicPr>
-          <p:cNvPr id="4" name="Picture 3" descr="Transverse cross-section of the abdomen: anterior at top, posterior at bottom. A peritoneal cavity bounded by the parietal peritoneum sits toward the front and holds an intraperitoneal organ wrapped in visceral peritoneum on a mesentery. Behind the cavity, against the posterior wall beside the vertebra, sit the retroperitoneal organs (SAD PUCKER), covered by peritoneum only on their front surface."/>
+          <p:cNvPr id="5" name="Picture 4" descr="Cross-section of the thorax: lungs wrapped by visceral pleura, parietal pleura lining the wall, and the pleural cavity with fluid between them."/>
           <p:cNvPicPr>
             <a:picLocks noChangeAspect="1"/>
           </p:cNvPicPr>
@@ -5706,8 +5967,8 @@
         </p:blipFill>
         <p:spPr>
           <a:xfrm>
-            <a:off x="3383280" y="1508760"/>
-            <a:ext cx="5486400" cy="3943350"/>
+            <a:off x="5257800" y="2349047"/>
+            <a:ext cx="6446520" cy="3622944"/>
           </a:xfrm>
           <a:prstGeom prst="rect">
             <a:avLst/>
@@ -5728,7 +5989,7 @@
     <p:bg>
       <p:bgPr>
         <a:solidFill>
-          <a:srgbClr val="0B1530"/>
+          <a:srgbClr val="FFFFFF"/>
         </a:solidFill>
         <a:effectLst/>
       </p:bgPr>
@@ -5752,22 +6013,22 @@
         </p:nvSpPr>
         <p:spPr>
           <a:xfrm>
-            <a:off x="822960" y="2286000"/>
-            <a:ext cx="10515600" cy="1463040"/>
-          </a:xfrm>
-        </p:spPr>
-        <p:txBody>
-          <a:bodyPr wrap="square"/>
-          <a:lstStyle/>
-          <a:p>
-            <a:r>
-              <a:rPr sz="4000" b="1" i="0">
-                <a:solidFill>
-                  <a:srgbClr val="FFFFFF"/>
-                </a:solidFill>
-                <a:latin typeface="Calibri"/>
-              </a:rPr>
-              <a:t>Membranes: Mucous and Serous</a:t>
+            <a:off x="640080" y="713232"/>
+            <a:ext cx="10972800" cy="822960"/>
+          </a:xfrm>
+        </p:spPr>
+        <p:txBody>
+          <a:bodyPr/>
+          <a:lstStyle/>
+          <a:p>
+            <a:r>
+              <a:rPr sz="2900" b="1" i="0">
+                <a:solidFill>
+                  <a:srgbClr val="0B1530"/>
+                </a:solidFill>
+                <a:latin typeface="Calibri"/>
+              </a:rPr>
+              <a:t>Pericardium: around the heart</a:t>
             </a:r>
           </a:p>
         </p:txBody>
@@ -5780,8 +6041,8 @@
         </p:nvSpPr>
         <p:spPr>
           <a:xfrm>
-            <a:off x="822960" y="1828800"/>
-            <a:ext cx="10515600" cy="457200"/>
+            <a:off x="640080" y="365760"/>
+            <a:ext cx="10972800" cy="365760"/>
           </a:xfrm>
           <a:prstGeom prst="rect">
             <a:avLst/>
@@ -5795,13 +6056,13 @@
           <a:lstStyle/>
           <a:p>
             <a:r>
-              <a:rPr sz="1500" b="1" i="0">
-                <a:solidFill>
-                  <a:srgbClr val="C9A14A"/>
-                </a:solidFill>
-                <a:latin typeface="Calibri"/>
-              </a:rPr>
-              <a:t>Part 6</a:t>
+              <a:rPr sz="1200" b="1" i="0">
+                <a:solidFill>
+                  <a:srgbClr val="8B3A2E"/>
+                </a:solidFill>
+                <a:latin typeface="Calibri"/>
+              </a:rPr>
+              <a:t>FOCUS: HUMAN ANATOMY · FOUNDATIONS</a:t>
             </a:r>
           </a:p>
         </p:txBody>
@@ -5814,8 +6075,8 @@
         </p:nvSpPr>
         <p:spPr>
           <a:xfrm>
-            <a:off x="822960" y="4114800"/>
-            <a:ext cx="10332720" cy="1463040"/>
+            <a:off x="502920" y="1783080"/>
+            <a:ext cx="4526280" cy="4800600"/>
           </a:xfrm>
           <a:prstGeom prst="rect">
             <a:avLst/>
@@ -5828,18 +6089,115 @@
           </a:bodyPr>
           <a:lstStyle/>
           <a:p>
-            <a:r>
-              <a:rPr sz="1800" b="0" i="0">
-                <a:solidFill>
-                  <a:srgbClr val="E6EAF0"/>
-                </a:solidFill>
-                <a:latin typeface="Calibri"/>
-              </a:rPr>
-              <a:t>Serous membranes wrap the heart, lungs, and abdominal organs.</a:t>
-            </a:r>
-          </a:p>
-        </p:txBody>
-      </p:sp>
+            <a:pPr>
+              <a:lnSpc>
+                <a:spcPct val="105000"/>
+              </a:lnSpc>
+              <a:spcAft>
+                <a:spcPts val="1100"/>
+              </a:spcAft>
+            </a:pPr>
+            <a:r>
+              <a:rPr sz="1700" b="1" i="0">
+                <a:solidFill>
+                  <a:srgbClr val="8B3A2E"/>
+                </a:solidFill>
+                <a:latin typeface="Calibri"/>
+              </a:rPr>
+              <a:t>Parietal pericardium </a:t>
+            </a:r>
+            <a:r>
+              <a:rPr sz="1700" b="0" i="0">
+                <a:solidFill>
+                  <a:srgbClr val="0B1530"/>
+                </a:solidFill>
+                <a:latin typeface="Calibri"/>
+              </a:rPr>
+              <a:t>lines the fibrous sac; visceral pericardium (epicardium) covers the heart.</a:t>
+            </a:r>
+          </a:p>
+          <a:p>
+            <a:pPr>
+              <a:lnSpc>
+                <a:spcPct val="105000"/>
+              </a:lnSpc>
+              <a:spcAft>
+                <a:spcPts val="1100"/>
+              </a:spcAft>
+            </a:pPr>
+            <a:r>
+              <a:rPr sz="1700" b="1" i="0">
+                <a:solidFill>
+                  <a:srgbClr val="8B3A2E"/>
+                </a:solidFill>
+                <a:latin typeface="Calibri"/>
+              </a:rPr>
+              <a:t>Between them </a:t>
+            </a:r>
+            <a:r>
+              <a:rPr sz="1700" b="0" i="0">
+                <a:solidFill>
+                  <a:srgbClr val="0B1530"/>
+                </a:solidFill>
+                <a:latin typeface="Calibri"/>
+              </a:rPr>
+              <a:t>is the pericardial cavity with pericardial fluid.</a:t>
+            </a:r>
+          </a:p>
+          <a:p>
+            <a:pPr>
+              <a:lnSpc>
+                <a:spcPct val="105000"/>
+              </a:lnSpc>
+              <a:spcAft>
+                <a:spcPts val="1100"/>
+              </a:spcAft>
+            </a:pPr>
+            <a:r>
+              <a:rPr sz="1700" b="1" i="0">
+                <a:solidFill>
+                  <a:srgbClr val="8B3A2E"/>
+                </a:solidFill>
+                <a:latin typeface="Calibri"/>
+              </a:rPr>
+              <a:t>Fluid build-up </a:t>
+            </a:r>
+            <a:r>
+              <a:rPr sz="1700" b="0" i="0">
+                <a:solidFill>
+                  <a:srgbClr val="0B1530"/>
+                </a:solidFill>
+                <a:latin typeface="Calibri"/>
+              </a:rPr>
+              <a:t>can compress the heart: cardiac tamponade.</a:t>
+            </a:r>
+          </a:p>
+        </p:txBody>
+      </p:sp>
+      <p:pic>
+        <p:nvPicPr>
+          <p:cNvPr id="5" name="Picture 4" descr="The heart with visceral pericardium on its surface, parietal pericardium forming the outer sac, and the pericardial cavity with fluid between the layers."/>
+          <p:cNvPicPr>
+            <a:picLocks noChangeAspect="1"/>
+          </p:cNvPicPr>
+          <p:nvPr/>
+        </p:nvPicPr>
+        <p:blipFill>
+          <a:blip r:embed="rId2"/>
+          <a:stretch>
+            <a:fillRect/>
+          </a:stretch>
+        </p:blipFill>
+        <p:spPr>
+          <a:xfrm>
+            <a:off x="5257800" y="2349047"/>
+            <a:ext cx="6446520" cy="3622944"/>
+          </a:xfrm>
+          <a:prstGeom prst="rect">
+            <a:avLst/>
+          </a:prstGeom>
+        </p:spPr>
+      </p:pic>
     </p:spTree>
   </p:cSld>
   <p:clrMapOvr>
@@ -5887,13 +6245,13 @@
           <a:lstStyle/>
           <a:p>
             <a:r>
-              <a:rPr sz="3000" b="1" i="0">
+              <a:rPr sz="2900" b="1" i="0">
                 <a:solidFill>
                   <a:srgbClr val="0B1530"/>
                 </a:solidFill>
                 <a:latin typeface="Calibri"/>
               </a:rPr>
-              <a:t>Two membrane types to separate</a:t>
+              <a:t>Peritoneum: around the abdominal organs</a:t>
             </a:r>
           </a:p>
         </p:txBody>
@@ -5927,7 +6285,7 @@
                 </a:solidFill>
                 <a:latin typeface="Calibri"/>
               </a:rPr>
-              <a:t>HUMAN ANATOMY · FOUNDATIONS</a:t>
+              <a:t>FOCUS: HUMAN ANATOMY · FOUNDATIONS</a:t>
             </a:r>
           </a:p>
         </p:txBody>
@@ -5940,8 +6298,8 @@
         </p:nvSpPr>
         <p:spPr>
           <a:xfrm>
-            <a:off x="640080" y="1783080"/>
-            <a:ext cx="10972800" cy="4800600"/>
+            <a:off x="502920" y="1783080"/>
+            <a:ext cx="4526280" cy="4800600"/>
           </a:xfrm>
           <a:prstGeom prst="rect">
             <a:avLst/>
@@ -5956,117 +6314,113 @@
           <a:p>
             <a:pPr>
               <a:lnSpc>
-                <a:spcPct val="106000"/>
+                <a:spcPct val="105000"/>
               </a:lnSpc>
               <a:spcAft>
                 <a:spcPts val="1100"/>
               </a:spcAft>
             </a:pPr>
             <a:r>
-              <a:rPr sz="1800" b="1" i="0">
+              <a:rPr sz="1700" b="1" i="0">
                 <a:solidFill>
                   <a:srgbClr val="8B3A2E"/>
                 </a:solidFill>
                 <a:latin typeface="Calibri"/>
               </a:rPr>
-              <a:t>Mucous membranes </a:t>
-            </a:r>
-            <a:r>
-              <a:rPr sz="1800" b="0" i="0">
+              <a:t>Parietal peritoneum </a:t>
+            </a:r>
+            <a:r>
+              <a:rPr sz="1700" b="0" i="0">
                 <a:solidFill>
                   <a:srgbClr val="0B1530"/>
                 </a:solidFill>
                 <a:latin typeface="Calibri"/>
               </a:rPr>
-              <a:t>line cavities that open to the outside (respiratory, digestive, urinary, reproductive). They secrete mucus.</a:t>
+              <a:t>lines the abdominal wall; visceral peritoneum covers the organs.</a:t>
             </a:r>
           </a:p>
           <a:p>
             <a:pPr>
               <a:lnSpc>
-                <a:spcPct val="106000"/>
+                <a:spcPct val="105000"/>
               </a:lnSpc>
               <a:spcAft>
                 <a:spcPts val="1100"/>
               </a:spcAft>
             </a:pPr>
             <a:r>
-              <a:rPr sz="1800" b="1" i="0">
+              <a:rPr sz="1700" b="1" i="0">
                 <a:solidFill>
                   <a:srgbClr val="8B3A2E"/>
                 </a:solidFill>
                 <a:latin typeface="Calibri"/>
               </a:rPr>
-              <a:t>Serous membranes </a:t>
-            </a:r>
-            <a:r>
-              <a:rPr sz="1800" b="0" i="0">
+              <a:t>Between them </a:t>
+            </a:r>
+            <a:r>
+              <a:rPr sz="1700" b="0" i="0">
                 <a:solidFill>
                   <a:srgbClr val="0B1530"/>
                 </a:solidFill>
                 <a:latin typeface="Calibri"/>
               </a:rPr>
-              <a:t>line closed cavities and cover the organs inside them. They secrete thin serous fluid that reduces friction.</a:t>
+              <a:t>is the peritoneal cavity with peritoneal fluid.</a:t>
             </a:r>
           </a:p>
           <a:p>
             <a:pPr>
               <a:lnSpc>
-                <a:spcPct val="106000"/>
+                <a:spcPct val="105000"/>
               </a:lnSpc>
               <a:spcAft>
                 <a:spcPts val="1100"/>
               </a:spcAft>
             </a:pPr>
             <a:r>
-              <a:rPr sz="1800" b="1" i="0">
+              <a:rPr sz="1700" b="1" i="0">
                 <a:solidFill>
                   <a:srgbClr val="8B3A2E"/>
                 </a:solidFill>
                 <a:latin typeface="Calibri"/>
               </a:rPr>
-              <a:t>Two layers: </a:t>
-            </a:r>
-            <a:r>
-              <a:rPr sz="1800" b="0" i="0">
+              <a:t>Inflammation </a:t>
+            </a:r>
+            <a:r>
+              <a:rPr sz="1700" b="0" i="0">
                 <a:solidFill>
                   <a:srgbClr val="0B1530"/>
                 </a:solidFill>
                 <a:latin typeface="Calibri"/>
               </a:rPr>
-              <a:t>a parietal layer (lines the wall) and a visceral layer (covers the organ).</a:t>
-            </a:r>
-          </a:p>
-          <a:p>
-            <a:pPr>
-              <a:lnSpc>
-                <a:spcPct val="106000"/>
-              </a:lnSpc>
-              <a:spcAft>
-                <a:spcPts val="1100"/>
-              </a:spcAft>
-            </a:pPr>
-            <a:r>
-              <a:rPr sz="1800" b="1" i="0">
-                <a:solidFill>
-                  <a:srgbClr val="8B3A2E"/>
-                </a:solidFill>
-                <a:latin typeface="Calibri"/>
-              </a:rPr>
-              <a:t>Between them: </a:t>
-            </a:r>
-            <a:r>
-              <a:rPr sz="1800" b="0" i="0">
-                <a:solidFill>
-                  <a:srgbClr val="0B1530"/>
-                </a:solidFill>
-                <a:latin typeface="Calibri"/>
-              </a:rPr>
-              <a:t>a fluid-filled serous cavity.</a:t>
-            </a:r>
-          </a:p>
-        </p:txBody>
-      </p:sp>
+              <a:t>is peritonitis; retroperitoneal organs sit behind this cavity.</a:t>
+            </a:r>
+          </a:p>
+        </p:txBody>
+      </p:sp>
+      <p:pic>
+        <p:nvPicPr>
+          <p:cNvPr id="5" name="Picture 4" descr="Sagittal section of the abdomen: organs covered by visceral peritoneum, parietal peritoneum lining the wall, and the peritoneal cavity with fluid between the layers."/>
+          <p:cNvPicPr>
+            <a:picLocks noChangeAspect="1"/>
+          </p:cNvPicPr>
+          <p:nvPr/>
+        </p:nvPicPr>
+        <p:blipFill>
+          <a:blip r:embed="rId2"/>
+          <a:stretch>
+            <a:fillRect/>
+          </a:stretch>
+        </p:blipFill>
+        <p:spPr>
+          <a:xfrm>
+            <a:off x="5257800" y="2349047"/>
+            <a:ext cx="6446520" cy="3622944"/>
+          </a:xfrm>
+          <a:prstGeom prst="rect">
+            <a:avLst/>
+          </a:prstGeom>
+        </p:spPr>
+      </p:pic>
     </p:spTree>
   </p:cSld>
   <p:clrMapOvr>
@@ -6081,7 +6435,7 @@
     <p:bg>
       <p:bgPr>
         <a:solidFill>
-          <a:srgbClr val="FFFFFF"/>
+          <a:srgbClr val="0B1530"/>
         </a:solidFill>
         <a:effectLst/>
       </p:bgPr>
@@ -6105,22 +6459,22 @@
         </p:nvSpPr>
         <p:spPr>
           <a:xfrm>
-            <a:off x="640080" y="713232"/>
-            <a:ext cx="10972800" cy="822960"/>
-          </a:xfrm>
-        </p:spPr>
-        <p:txBody>
-          <a:bodyPr/>
-          <a:lstStyle/>
-          <a:p>
-            <a:r>
-              <a:rPr sz="3000" b="1" i="0">
-                <a:solidFill>
-                  <a:srgbClr val="0B1530"/>
-                </a:solidFill>
-                <a:latin typeface="Calibri"/>
-              </a:rPr>
-              <a:t>Every serous membrane shares one plan</a:t>
+            <a:off x="822960" y="2286000"/>
+            <a:ext cx="10515600" cy="1463040"/>
+          </a:xfrm>
+        </p:spPr>
+        <p:txBody>
+          <a:bodyPr wrap="square"/>
+          <a:lstStyle/>
+          <a:p>
+            <a:r>
+              <a:rPr sz="4000" b="1" i="0">
+                <a:solidFill>
+                  <a:srgbClr val="FFFFFF"/>
+                </a:solidFill>
+                <a:latin typeface="Calibri"/>
+              </a:rPr>
+              <a:t>Problem Solving with the Terminology</a:t>
             </a:r>
           </a:p>
         </p:txBody>
@@ -6133,8 +6487,8 @@
         </p:nvSpPr>
         <p:spPr>
           <a:xfrm>
-            <a:off x="640080" y="365760"/>
-            <a:ext cx="10972800" cy="365760"/>
+            <a:off x="822960" y="1828800"/>
+            <a:ext cx="10515600" cy="457200"/>
           </a:xfrm>
           <a:prstGeom prst="rect">
             <a:avLst/>
@@ -6148,41 +6502,51 @@
           <a:lstStyle/>
           <a:p>
             <a:r>
-              <a:rPr sz="1200" b="1" i="0">
-                <a:solidFill>
-                  <a:srgbClr val="8B3A2E"/>
-                </a:solidFill>
-                <a:latin typeface="Calibri"/>
-              </a:rPr>
-              <a:t>HUMAN ANATOMY · FOUNDATIONS</a:t>
-            </a:r>
-          </a:p>
-        </p:txBody>
-      </p:sp>
-      <p:pic>
-        <p:nvPicPr>
-          <p:cNvPr id="4" name="Picture 3" descr="Schematic of a serous membrane: an organ wrapped by an inner visceral layer, a serous cavity with a thin film of serous fluid around it, and an outer parietal layer that lines the cavity wall. The same plan applies to the pleura (lungs), pericardium (heart), and peritoneum (abdominal organs)."/>
-          <p:cNvPicPr>
-            <a:picLocks noChangeAspect="1"/>
-          </p:cNvPicPr>
+              <a:rPr sz="1500" b="1" i="0">
+                <a:solidFill>
+                  <a:srgbClr val="C9A14A"/>
+                </a:solidFill>
+                <a:latin typeface="Calibri"/>
+              </a:rPr>
+              <a:t>Part 7</a:t>
+            </a:r>
+          </a:p>
+        </p:txBody>
+      </p:sp>
+      <p:sp>
+        <p:nvSpPr>
+          <p:cNvPr id="4" name="TextBox 3"/>
+          <p:cNvSpPr txBox="1"/>
           <p:nvPr/>
-        </p:nvPicPr>
-        <p:blipFill>
-          <a:blip r:embed="rId2"/>
-          <a:stretch>
-            <a:fillRect/>
-          </a:stretch>
-        </p:blipFill>
-        <p:spPr>
-          <a:xfrm>
-            <a:off x="2377440" y="1783080"/>
-            <a:ext cx="7406640" cy="4082910"/>
+        </p:nvSpPr>
+        <p:spPr>
+          <a:xfrm>
+            <a:off x="822960" y="4114800"/>
+            <a:ext cx="10332720" cy="1463040"/>
           </a:xfrm>
           <a:prstGeom prst="rect">
             <a:avLst/>
           </a:prstGeom>
-        </p:spPr>
-      </p:pic>
+          <a:noFill/>
+        </p:spPr>
+        <p:txBody>
+          <a:bodyPr wrap="square" lIns="0" rIns="0" tIns="0" bIns="0">
+            <a:spAutoFit/>
+          </a:bodyPr>
+          <a:lstStyle/>
+          <a:p>
+            <a:r>
+              <a:rPr sz="1800" b="0" i="0">
+                <a:solidFill>
+                  <a:srgbClr val="E6EAF0"/>
+                </a:solidFill>
+                <a:latin typeface="Calibri"/>
+              </a:rPr>
+              <a:t>Locate, predict, and interpret, the same skills a clinician uses every day.</a:t>
+            </a:r>
+          </a:p>
+        </p:txBody>
+      </p:sp>
     </p:spTree>
   </p:cSld>
   <p:clrMapOvr>
@@ -6230,13 +6594,13 @@
           <a:lstStyle/>
           <a:p>
             <a:r>
-              <a:rPr sz="3000" b="1" i="0">
+              <a:rPr sz="2900" b="1" i="0">
                 <a:solidFill>
                   <a:srgbClr val="0B1530"/>
                 </a:solidFill>
                 <a:latin typeface="Calibri"/>
               </a:rPr>
-              <a:t>Pleura: around the lungs</a:t>
+              <a:t>Recall: name it (DOK 1)</a:t>
             </a:r>
           </a:p>
         </p:txBody>
@@ -6270,7 +6634,7 @@
                 </a:solidFill>
                 <a:latin typeface="Calibri"/>
               </a:rPr>
-              <a:t>HUMAN ANATOMY · FOUNDATIONS</a:t>
+              <a:t>DOK 1 · RECALL</a:t>
             </a:r>
           </a:p>
         </p:txBody>
@@ -6299,58 +6663,85 @@
           <a:p>
             <a:pPr>
               <a:lnSpc>
-                <a:spcPct val="106000"/>
+                <a:spcPct val="105000"/>
               </a:lnSpc>
               <a:spcAft>
-                <a:spcPts val="1200"/>
+                <a:spcPts val="1800"/>
               </a:spcAft>
             </a:pPr>
             <a:r>
-              <a:rPr sz="1900" b="0" i="0">
+              <a:rPr sz="2000" b="1" i="0">
+                <a:solidFill>
+                  <a:srgbClr val="8B3A2E"/>
+                </a:solidFill>
+                <a:latin typeface="Calibri"/>
+              </a:rPr>
+              <a:t>Recall </a:t>
+            </a:r>
+            <a:r>
+              <a:rPr sz="2000" b="0" i="0">
                 <a:solidFill>
                   <a:srgbClr val="0B1530"/>
                 </a:solidFill>
                 <a:latin typeface="Calibri"/>
               </a:rPr>
-              <a:t>Parietal pleura lines the thoracic wall; visceral pleura covers the lung.</a:t>
+              <a:t>asks you to state a fact or term directly.</a:t>
             </a:r>
           </a:p>
           <a:p>
             <a:pPr>
               <a:lnSpc>
-                <a:spcPct val="106000"/>
+                <a:spcPct val="105000"/>
               </a:lnSpc>
               <a:spcAft>
-                <a:spcPts val="1200"/>
+                <a:spcPts val="1800"/>
               </a:spcAft>
             </a:pPr>
             <a:r>
-              <a:rPr sz="1900" b="0" i="0">
+              <a:rPr sz="2000" b="1" i="0">
+                <a:solidFill>
+                  <a:srgbClr val="8B3A2E"/>
+                </a:solidFill>
+                <a:latin typeface="Calibri"/>
+              </a:rPr>
+              <a:t>Q. </a:t>
+            </a:r>
+            <a:r>
+              <a:rPr sz="2000" b="0" i="0">
                 <a:solidFill>
                   <a:srgbClr val="0B1530"/>
                 </a:solidFill>
                 <a:latin typeface="Calibri"/>
               </a:rPr>
-              <a:t>Between them: the pleural cavity with pleural fluid.</a:t>
+              <a:t>The wrist is ______ to the elbow.  (Proximal / Distal / Superficial)</a:t>
             </a:r>
           </a:p>
           <a:p>
             <a:pPr>
               <a:lnSpc>
-                <a:spcPct val="106000"/>
+                <a:spcPct val="105000"/>
               </a:lnSpc>
               <a:spcAft>
-                <a:spcPts val="1200"/>
+                <a:spcPts val="1800"/>
               </a:spcAft>
             </a:pPr>
             <a:r>
-              <a:rPr sz="1900" b="0" i="0">
+              <a:rPr sz="2000" b="1" i="0">
+                <a:solidFill>
+                  <a:srgbClr val="8B3A2E"/>
+                </a:solidFill>
+                <a:latin typeface="Calibri"/>
+              </a:rPr>
+              <a:t>Answer: </a:t>
+            </a:r>
+            <a:r>
+              <a:rPr sz="2000" b="0" i="0">
                 <a:solidFill>
                   <a:srgbClr val="0B1530"/>
                 </a:solidFill>
                 <a:latin typeface="Calibri"/>
               </a:rPr>
-              <a:t>Inflammation is pleuritis; air in the cavity is a pneumothorax.</a:t>
+              <a:t>Distal, farther from the trunk than the elbow.</a:t>
             </a:r>
           </a:p>
         </p:txBody>
@@ -6402,13 +6793,13 @@
           <a:lstStyle/>
           <a:p>
             <a:r>
-              <a:rPr sz="3000" b="1" i="0">
+              <a:rPr sz="2900" b="1" i="0">
                 <a:solidFill>
                   <a:srgbClr val="0B1530"/>
                 </a:solidFill>
                 <a:latin typeface="Calibri"/>
               </a:rPr>
-              <a:t>Pericardium: around the heart</a:t>
+              <a:t>Apply: use the concept (DOK 2)</a:t>
             </a:r>
           </a:p>
         </p:txBody>
@@ -6442,7 +6833,7 @@
                 </a:solidFill>
                 <a:latin typeface="Calibri"/>
               </a:rPr>
-              <a:t>HUMAN ANATOMY · FOUNDATIONS</a:t>
+              <a:t>DOK 2 · SKILL / CONCEPT</a:t>
             </a:r>
           </a:p>
         </p:txBody>
@@ -6471,58 +6862,85 @@
           <a:p>
             <a:pPr>
               <a:lnSpc>
-                <a:spcPct val="106000"/>
+                <a:spcPct val="105000"/>
               </a:lnSpc>
               <a:spcAft>
-                <a:spcPts val="1200"/>
+                <a:spcPts val="1600"/>
               </a:spcAft>
             </a:pPr>
             <a:r>
+              <a:rPr sz="1900" b="1" i="0">
+                <a:solidFill>
+                  <a:srgbClr val="8B3A2E"/>
+                </a:solidFill>
+                <a:latin typeface="Calibri"/>
+              </a:rPr>
+              <a:t>Apply </a:t>
+            </a:r>
+            <a:r>
               <a:rPr sz="1900" b="0" i="0">
                 <a:solidFill>
                   <a:srgbClr val="0B1530"/>
                 </a:solidFill>
                 <a:latin typeface="Calibri"/>
               </a:rPr>
-              <a:t>Parietal pericardium lines the fibrous sac; visceral pericardium (epicardium) covers the heart.</a:t>
+              <a:t>asks you to use a concept or classify, not just recall.</a:t>
             </a:r>
           </a:p>
           <a:p>
             <a:pPr>
               <a:lnSpc>
-                <a:spcPct val="106000"/>
+                <a:spcPct val="105000"/>
               </a:lnSpc>
               <a:spcAft>
-                <a:spcPts val="1200"/>
+                <a:spcPts val="1600"/>
               </a:spcAft>
             </a:pPr>
             <a:r>
+              <a:rPr sz="1900" b="1" i="0">
+                <a:solidFill>
+                  <a:srgbClr val="8B3A2E"/>
+                </a:solidFill>
+                <a:latin typeface="Calibri"/>
+              </a:rPr>
+              <a:t>Q. </a:t>
+            </a:r>
+            <a:r>
               <a:rPr sz="1900" b="0" i="0">
                 <a:solidFill>
                   <a:srgbClr val="0B1530"/>
                 </a:solidFill>
                 <a:latin typeface="Calibri"/>
               </a:rPr>
-              <a:t>Between them: the pericardial cavity with pericardial fluid.</a:t>
+              <a:t>Right-lower-quadrant tenderness most directly raises which organ?  (Gallbladder / Appendix / Spleen)</a:t>
             </a:r>
           </a:p>
           <a:p>
             <a:pPr>
               <a:lnSpc>
-                <a:spcPct val="106000"/>
+                <a:spcPct val="105000"/>
               </a:lnSpc>
               <a:spcAft>
-                <a:spcPts val="1200"/>
+                <a:spcPts val="1600"/>
               </a:spcAft>
             </a:pPr>
             <a:r>
+              <a:rPr sz="1900" b="1" i="0">
+                <a:solidFill>
+                  <a:srgbClr val="8B3A2E"/>
+                </a:solidFill>
+                <a:latin typeface="Calibri"/>
+              </a:rPr>
+              <a:t>Answer: </a:t>
+            </a:r>
+            <a:r>
               <a:rPr sz="1900" b="0" i="0">
                 <a:solidFill>
                   <a:srgbClr val="0B1530"/>
                 </a:solidFill>
                 <a:latin typeface="Calibri"/>
               </a:rPr>
-              <a:t>Fluid building up here can compress the heart: cardiac tamponade.</a:t>
+              <a:t>Appendix, which sits in the RLQ.</a:t>
             </a:r>
           </a:p>
         </p:txBody>
@@ -6574,13 +6992,13 @@
           <a:lstStyle/>
           <a:p>
             <a:r>
-              <a:rPr sz="3000" b="1" i="0">
+              <a:rPr sz="2900" b="1" i="0">
                 <a:solidFill>
                   <a:srgbClr val="0B1530"/>
                 </a:solidFill>
                 <a:latin typeface="Calibri"/>
               </a:rPr>
-              <a:t>Peritoneum: around the abdominal organs</a:t>
+              <a:t>Reason: put it together (DOK 3)</a:t>
             </a:r>
           </a:p>
         </p:txBody>
@@ -6614,7 +7032,7 @@
                 </a:solidFill>
                 <a:latin typeface="Calibri"/>
               </a:rPr>
-              <a:t>HUMAN ANATOMY · FOUNDATIONS</a:t>
+              <a:t>DOK 3 · STRATEGIC REASONING</a:t>
             </a:r>
           </a:p>
         </p:txBody>
@@ -6643,58 +7061,85 @@
           <a:p>
             <a:pPr>
               <a:lnSpc>
-                <a:spcPct val="106000"/>
+                <a:spcPct val="105000"/>
               </a:lnSpc>
               <a:spcAft>
                 <a:spcPts val="1200"/>
               </a:spcAft>
             </a:pPr>
             <a:r>
-              <a:rPr sz="1900" b="0" i="0">
+              <a:rPr sz="1800" b="1" i="0">
+                <a:solidFill>
+                  <a:srgbClr val="8B3A2E"/>
+                </a:solidFill>
+                <a:latin typeface="Calibri"/>
+              </a:rPr>
+              <a:t>Reason </a:t>
+            </a:r>
+            <a:r>
+              <a:rPr sz="1800" b="0" i="0">
                 <a:solidFill>
                   <a:srgbClr val="0B1530"/>
                 </a:solidFill>
                 <a:latin typeface="Calibri"/>
               </a:rPr>
-              <a:t>Parietal peritoneum lines the abdominal wall; visceral peritoneum covers the organs.</a:t>
+              <a:t>asks you to connect several ideas and justify.</a:t>
             </a:r>
           </a:p>
           <a:p>
             <a:pPr>
               <a:lnSpc>
-                <a:spcPct val="106000"/>
+                <a:spcPct val="105000"/>
               </a:lnSpc>
               <a:spcAft>
                 <a:spcPts val="1200"/>
               </a:spcAft>
             </a:pPr>
             <a:r>
-              <a:rPr sz="1900" b="0" i="0">
+              <a:rPr sz="1800" b="1" i="0">
+                <a:solidFill>
+                  <a:srgbClr val="8B3A2E"/>
+                </a:solidFill>
+                <a:latin typeface="Calibri"/>
+              </a:rPr>
+              <a:t>Q. </a:t>
+            </a:r>
+            <a:r>
+              <a:rPr sz="1800" b="0" i="0">
                 <a:solidFill>
                   <a:srgbClr val="0B1530"/>
                 </a:solidFill>
                 <a:latin typeface="Calibri"/>
               </a:rPr>
-              <a:t>Between them: the peritoneal cavity with peritoneal fluid.</a:t>
+              <a:t>A note reads: free fluid in the pleural cavity, right side. Between which structures is it, and what is it called?</a:t>
             </a:r>
           </a:p>
           <a:p>
             <a:pPr>
               <a:lnSpc>
-                <a:spcPct val="106000"/>
+                <a:spcPct val="105000"/>
               </a:lnSpc>
               <a:spcAft>
                 <a:spcPts val="1200"/>
               </a:spcAft>
             </a:pPr>
             <a:r>
-              <a:rPr sz="1900" b="0" i="0">
+              <a:rPr sz="1800" b="1" i="0">
+                <a:solidFill>
+                  <a:srgbClr val="8B3A2E"/>
+                </a:solidFill>
+                <a:latin typeface="Calibri"/>
+              </a:rPr>
+              <a:t>Answer: </a:t>
+            </a:r>
+            <a:r>
+              <a:rPr sz="1800" b="0" i="0">
                 <a:solidFill>
                   <a:srgbClr val="0B1530"/>
                 </a:solidFill>
                 <a:latin typeface="Calibri"/>
               </a:rPr>
-              <a:t>Inflammation is peritonitis; retroperitoneal organs sit behind this cavity.</a:t>
+              <a:t>Between the parietal and visceral pleura, around the right lung, a pleural effusion.</a:t>
             </a:r>
           </a:p>
         </p:txBody>
@@ -6713,7 +7158,7 @@
     <p:bg>
       <p:bgPr>
         <a:solidFill>
-          <a:srgbClr val="0B1530"/>
+          <a:srgbClr val="FFFFFF"/>
         </a:solidFill>
         <a:effectLst/>
       </p:bgPr>
@@ -6737,22 +7182,22 @@
         </p:nvSpPr>
         <p:spPr>
           <a:xfrm>
-            <a:off x="822960" y="2286000"/>
-            <a:ext cx="10515600" cy="1463040"/>
-          </a:xfrm>
-        </p:spPr>
-        <p:txBody>
-          <a:bodyPr wrap="square"/>
-          <a:lstStyle/>
-          <a:p>
-            <a:r>
-              <a:rPr sz="4000" b="1" i="0">
-                <a:solidFill>
-                  <a:srgbClr val="FFFFFF"/>
-                </a:solidFill>
-                <a:latin typeface="Calibri"/>
-              </a:rPr>
-              <a:t>Problem Solving with the Terminology</a:t>
+            <a:off x="640080" y="713232"/>
+            <a:ext cx="10972800" cy="822960"/>
+          </a:xfrm>
+        </p:spPr>
+        <p:txBody>
+          <a:bodyPr/>
+          <a:lstStyle/>
+          <a:p>
+            <a:r>
+              <a:rPr sz="2900" b="1" i="0">
+                <a:solidFill>
+                  <a:srgbClr val="0B1530"/>
+                </a:solidFill>
+                <a:latin typeface="Calibri"/>
+              </a:rPr>
+              <a:t>Label it from memory</a:t>
             </a:r>
           </a:p>
         </p:txBody>
@@ -6765,8 +7210,8 @@
         </p:nvSpPr>
         <p:spPr>
           <a:xfrm>
-            <a:off x="822960" y="1828800"/>
-            <a:ext cx="10515600" cy="457200"/>
+            <a:off x="640080" y="365760"/>
+            <a:ext cx="10972800" cy="365760"/>
           </a:xfrm>
           <a:prstGeom prst="rect">
             <a:avLst/>
@@ -6780,13 +7225,13 @@
           <a:lstStyle/>
           <a:p>
             <a:r>
-              <a:rPr sz="1500" b="1" i="0">
-                <a:solidFill>
-                  <a:srgbClr val="C9A14A"/>
-                </a:solidFill>
-                <a:latin typeface="Calibri"/>
-              </a:rPr>
-              <a:t>Part 7</a:t>
+              <a:rPr sz="1200" b="1" i="0">
+                <a:solidFill>
+                  <a:srgbClr val="8B3A2E"/>
+                </a:solidFill>
+                <a:latin typeface="Calibri"/>
+              </a:rPr>
+              <a:t>FOCUS: HUMAN ANATOMY · FOUNDATIONS</a:t>
             </a:r>
           </a:p>
         </p:txBody>
@@ -6799,8 +7244,8 @@
         </p:nvSpPr>
         <p:spPr>
           <a:xfrm>
-            <a:off x="822960" y="4114800"/>
-            <a:ext cx="10332720" cy="1463040"/>
+            <a:off x="502920" y="1783080"/>
+            <a:ext cx="4526280" cy="4800600"/>
           </a:xfrm>
           <a:prstGeom prst="rect">
             <a:avLst/>
@@ -6813,18 +7258,88 @@
           </a:bodyPr>
           <a:lstStyle/>
           <a:p>
+            <a:pPr>
+              <a:lnSpc>
+                <a:spcPct val="105000"/>
+              </a:lnSpc>
+              <a:spcAft>
+                <a:spcPts val="1200"/>
+              </a:spcAft>
+            </a:pPr>
             <a:r>
               <a:rPr sz="1800" b="0" i="0">
                 <a:solidFill>
-                  <a:srgbClr val="E6EAF0"/>
-                </a:solidFill>
-                <a:latin typeface="Calibri"/>
-              </a:rPr>
-              <a:t>Locate, predict, and interpret, the same skills a clinician uses every day.</a:t>
-            </a:r>
-          </a:p>
-        </p:txBody>
-      </p:sp>
+                  <a:srgbClr val="0B1530"/>
+                </a:solidFill>
+                <a:latin typeface="Calibri"/>
+              </a:rPr>
+              <a:t>Cover the labeled slide. Name every arrow on this blank diagram.</a:t>
+            </a:r>
+          </a:p>
+          <a:p>
+            <a:pPr>
+              <a:lnSpc>
+                <a:spcPct val="105000"/>
+              </a:lnSpc>
+              <a:spcAft>
+                <a:spcPts val="1200"/>
+              </a:spcAft>
+            </a:pPr>
+            <a:r>
+              <a:rPr sz="1800" b="0" i="0">
+                <a:solidFill>
+                  <a:srgbClr val="0B1530"/>
+                </a:solidFill>
+                <a:latin typeface="Calibri"/>
+              </a:rPr>
+              <a:t>Then sort each region as axial or appendicular.</a:t>
+            </a:r>
+          </a:p>
+          <a:p>
+            <a:pPr>
+              <a:lnSpc>
+                <a:spcPct val="105000"/>
+              </a:lnSpc>
+              <a:spcAft>
+                <a:spcPts val="1200"/>
+              </a:spcAft>
+            </a:pPr>
+            <a:r>
+              <a:rPr sz="1800" b="0" i="0">
+                <a:solidFill>
+                  <a:srgbClr val="0B1530"/>
+                </a:solidFill>
+                <a:latin typeface="Calibri"/>
+              </a:rPr>
+              <a:t>Draw the four planes through the figure and say what each divides.</a:t>
+            </a:r>
+          </a:p>
+        </p:txBody>
+      </p:sp>
+      <p:pic>
+        <p:nvPicPr>
+          <p:cNvPr id="5" name="Picture 4" descr="Blank anterior view of the body with unlabeled arrows pointing to regions, for the student to fill in."/>
+          <p:cNvPicPr>
+            <a:picLocks noChangeAspect="1"/>
+          </p:cNvPicPr>
+          <p:nvPr/>
+        </p:nvPicPr>
+        <p:blipFill>
+          <a:blip r:embed="rId2"/>
+          <a:stretch>
+            <a:fillRect/>
+          </a:stretch>
+        </p:blipFill>
+        <p:spPr>
+          <a:xfrm>
+            <a:off x="5257800" y="2349047"/>
+            <a:ext cx="6446520" cy="3622944"/>
+          </a:xfrm>
+          <a:prstGeom prst="rect">
+            <a:avLst/>
+          </a:prstGeom>
+        </p:spPr>
+      </p:pic>
     </p:spTree>
   </p:cSld>
   <p:clrMapOvr>
@@ -6872,7 +7387,7 @@
           <a:lstStyle/>
           <a:p>
             <a:r>
-              <a:rPr sz="3000" b="1" i="0">
+              <a:rPr sz="2900" b="1" i="0">
                 <a:solidFill>
                   <a:srgbClr val="0B1530"/>
                 </a:solidFill>
@@ -6912,7 +7427,7 @@
                 </a:solidFill>
                 <a:latin typeface="Calibri"/>
               </a:rPr>
-              <a:t>HUMAN ANATOMY · FOUNDATIONS</a:t>
+              <a:t>FOCUS: HUMAN ANATOMY · FOUNDATIONS</a:t>
             </a:r>
           </a:p>
         </p:txBody>
@@ -6941,7 +7456,7 @@
           <a:p>
             <a:pPr>
               <a:lnSpc>
-                <a:spcPct val="106000"/>
+                <a:spcPct val="105000"/>
               </a:lnSpc>
               <a:spcAft>
                 <a:spcPts val="1400"/>
@@ -6969,7 +7484,7 @@
           <a:p>
             <a:pPr>
               <a:lnSpc>
-                <a:spcPct val="106000"/>
+                <a:spcPct val="105000"/>
               </a:lnSpc>
               <a:spcAft>
                 <a:spcPts val="1400"/>
@@ -6997,7 +7512,7 @@
           <a:p>
             <a:pPr>
               <a:lnSpc>
-                <a:spcPct val="106000"/>
+                <a:spcPct val="105000"/>
               </a:lnSpc>
               <a:spcAft>
                 <a:spcPts val="1400"/>
@@ -7033,799 +7548,6 @@
 </file>
 
 <file path=ppt/slides/slide30.xml><?xml version="1.0" encoding="utf-8"?>
-<p:sld xmlns:a="http://schemas.openxmlformats.org/drawingml/2006/main" xmlns:p="http://schemas.openxmlformats.org/presentationml/2006/main" xmlns:r="http://schemas.openxmlformats.org/officeDocument/2006/relationships">
-  <p:cSld>
-    <p:bg>
-      <p:bgPr>
-        <a:solidFill>
-          <a:srgbClr val="FFFFFF"/>
-        </a:solidFill>
-        <a:effectLst/>
-      </p:bgPr>
-    </p:bg>
-    <p:spTree>
-      <p:nvGrpSpPr>
-        <p:cNvPr id="1" name=""/>
-        <p:cNvGrpSpPr/>
-        <p:nvPr/>
-      </p:nvGrpSpPr>
-      <p:grpSpPr/>
-      <p:sp>
-        <p:nvSpPr>
-          <p:cNvPr id="2" name="Title 1"/>
-          <p:cNvSpPr>
-            <a:spLocks noGrp="1"/>
-          </p:cNvSpPr>
-          <p:nvPr>
-            <p:ph type="title"/>
-          </p:nvPr>
-        </p:nvSpPr>
-        <p:spPr>
-          <a:xfrm>
-            <a:off x="640080" y="713232"/>
-            <a:ext cx="10972800" cy="822960"/>
-          </a:xfrm>
-        </p:spPr>
-        <p:txBody>
-          <a:bodyPr/>
-          <a:lstStyle/>
-          <a:p>
-            <a:r>
-              <a:rPr sz="3000" b="1" i="0">
-                <a:solidFill>
-                  <a:srgbClr val="0B1530"/>
-                </a:solidFill>
-                <a:latin typeface="Calibri"/>
-              </a:rPr>
-              <a:t>Recall: name it (DOK 1)</a:t>
-            </a:r>
-          </a:p>
-        </p:txBody>
-      </p:sp>
-      <p:sp>
-        <p:nvSpPr>
-          <p:cNvPr id="3" name="TextBox 2"/>
-          <p:cNvSpPr txBox="1"/>
-          <p:nvPr/>
-        </p:nvSpPr>
-        <p:spPr>
-          <a:xfrm>
-            <a:off x="640080" y="365760"/>
-            <a:ext cx="10972800" cy="365760"/>
-          </a:xfrm>
-          <a:prstGeom prst="rect">
-            <a:avLst/>
-          </a:prstGeom>
-          <a:noFill/>
-        </p:spPr>
-        <p:txBody>
-          <a:bodyPr wrap="square" lIns="0" rIns="0" tIns="0" bIns="0">
-            <a:spAutoFit/>
-          </a:bodyPr>
-          <a:lstStyle/>
-          <a:p>
-            <a:r>
-              <a:rPr sz="1200" b="1" i="0">
-                <a:solidFill>
-                  <a:srgbClr val="8B3A2E"/>
-                </a:solidFill>
-                <a:latin typeface="Calibri"/>
-              </a:rPr>
-              <a:t>DOK 1 · RECALL</a:t>
-            </a:r>
-          </a:p>
-        </p:txBody>
-      </p:sp>
-      <p:sp>
-        <p:nvSpPr>
-          <p:cNvPr id="4" name="TextBox 3"/>
-          <p:cNvSpPr txBox="1"/>
-          <p:nvPr/>
-        </p:nvSpPr>
-        <p:spPr>
-          <a:xfrm>
-            <a:off x="640080" y="1783080"/>
-            <a:ext cx="10972800" cy="4800600"/>
-          </a:xfrm>
-          <a:prstGeom prst="rect">
-            <a:avLst/>
-          </a:prstGeom>
-          <a:noFill/>
-        </p:spPr>
-        <p:txBody>
-          <a:bodyPr wrap="square" lIns="0" rIns="0" tIns="0" bIns="0">
-            <a:spAutoFit/>
-          </a:bodyPr>
-          <a:lstStyle/>
-          <a:p>
-            <a:pPr>
-              <a:lnSpc>
-                <a:spcPct val="106000"/>
-              </a:lnSpc>
-              <a:spcAft>
-                <a:spcPts val="1800"/>
-              </a:spcAft>
-            </a:pPr>
-            <a:r>
-              <a:rPr sz="2000" b="1" i="0">
-                <a:solidFill>
-                  <a:srgbClr val="8B3A2E"/>
-                </a:solidFill>
-                <a:latin typeface="Calibri"/>
-              </a:rPr>
-              <a:t>Recall </a:t>
-            </a:r>
-            <a:r>
-              <a:rPr sz="2000" b="0" i="0">
-                <a:solidFill>
-                  <a:srgbClr val="0B1530"/>
-                </a:solidFill>
-                <a:latin typeface="Calibri"/>
-              </a:rPr>
-              <a:t>asks you to state a fact or term directly.</a:t>
-            </a:r>
-          </a:p>
-          <a:p>
-            <a:pPr>
-              <a:lnSpc>
-                <a:spcPct val="106000"/>
-              </a:lnSpc>
-              <a:spcAft>
-                <a:spcPts val="1800"/>
-              </a:spcAft>
-            </a:pPr>
-            <a:r>
-              <a:rPr sz="2000" b="1" i="0">
-                <a:solidFill>
-                  <a:srgbClr val="8B3A2E"/>
-                </a:solidFill>
-                <a:latin typeface="Calibri"/>
-              </a:rPr>
-              <a:t>Q. </a:t>
-            </a:r>
-            <a:r>
-              <a:rPr sz="2000" b="0" i="0">
-                <a:solidFill>
-                  <a:srgbClr val="0B1530"/>
-                </a:solidFill>
-                <a:latin typeface="Calibri"/>
-              </a:rPr>
-              <a:t>The wrist is ______ to the elbow.  (Proximal / Distal / Superficial)</a:t>
-            </a:r>
-          </a:p>
-          <a:p>
-            <a:pPr>
-              <a:lnSpc>
-                <a:spcPct val="106000"/>
-              </a:lnSpc>
-              <a:spcAft>
-                <a:spcPts val="1800"/>
-              </a:spcAft>
-            </a:pPr>
-            <a:r>
-              <a:rPr sz="2000" b="1" i="0">
-                <a:solidFill>
-                  <a:srgbClr val="8B3A2E"/>
-                </a:solidFill>
-                <a:latin typeface="Calibri"/>
-              </a:rPr>
-              <a:t>Answer: </a:t>
-            </a:r>
-            <a:r>
-              <a:rPr sz="2000" b="0" i="0">
-                <a:solidFill>
-                  <a:srgbClr val="0B1530"/>
-                </a:solidFill>
-                <a:latin typeface="Calibri"/>
-              </a:rPr>
-              <a:t>Distal, farther from the trunk than the elbow.</a:t>
-            </a:r>
-          </a:p>
-        </p:txBody>
-      </p:sp>
-    </p:spTree>
-  </p:cSld>
-  <p:clrMapOvr>
-    <a:masterClrMapping/>
-  </p:clrMapOvr>
-</p:sld>
-</file>
-
-<file path=ppt/slides/slide31.xml><?xml version="1.0" encoding="utf-8"?>
-<p:sld xmlns:a="http://schemas.openxmlformats.org/drawingml/2006/main" xmlns:p="http://schemas.openxmlformats.org/presentationml/2006/main" xmlns:r="http://schemas.openxmlformats.org/officeDocument/2006/relationships">
-  <p:cSld>
-    <p:bg>
-      <p:bgPr>
-        <a:solidFill>
-          <a:srgbClr val="FFFFFF"/>
-        </a:solidFill>
-        <a:effectLst/>
-      </p:bgPr>
-    </p:bg>
-    <p:spTree>
-      <p:nvGrpSpPr>
-        <p:cNvPr id="1" name=""/>
-        <p:cNvGrpSpPr/>
-        <p:nvPr/>
-      </p:nvGrpSpPr>
-      <p:grpSpPr/>
-      <p:sp>
-        <p:nvSpPr>
-          <p:cNvPr id="2" name="Title 1"/>
-          <p:cNvSpPr>
-            <a:spLocks noGrp="1"/>
-          </p:cNvSpPr>
-          <p:nvPr>
-            <p:ph type="title"/>
-          </p:nvPr>
-        </p:nvSpPr>
-        <p:spPr>
-          <a:xfrm>
-            <a:off x="640080" y="713232"/>
-            <a:ext cx="10972800" cy="822960"/>
-          </a:xfrm>
-        </p:spPr>
-        <p:txBody>
-          <a:bodyPr/>
-          <a:lstStyle/>
-          <a:p>
-            <a:r>
-              <a:rPr sz="3000" b="1" i="0">
-                <a:solidFill>
-                  <a:srgbClr val="0B1530"/>
-                </a:solidFill>
-                <a:latin typeface="Calibri"/>
-              </a:rPr>
-              <a:t>Apply: use the concept (DOK 2)</a:t>
-            </a:r>
-          </a:p>
-        </p:txBody>
-      </p:sp>
-      <p:sp>
-        <p:nvSpPr>
-          <p:cNvPr id="3" name="TextBox 2"/>
-          <p:cNvSpPr txBox="1"/>
-          <p:nvPr/>
-        </p:nvSpPr>
-        <p:spPr>
-          <a:xfrm>
-            <a:off x="640080" y="365760"/>
-            <a:ext cx="10972800" cy="365760"/>
-          </a:xfrm>
-          <a:prstGeom prst="rect">
-            <a:avLst/>
-          </a:prstGeom>
-          <a:noFill/>
-        </p:spPr>
-        <p:txBody>
-          <a:bodyPr wrap="square" lIns="0" rIns="0" tIns="0" bIns="0">
-            <a:spAutoFit/>
-          </a:bodyPr>
-          <a:lstStyle/>
-          <a:p>
-            <a:r>
-              <a:rPr sz="1200" b="1" i="0">
-                <a:solidFill>
-                  <a:srgbClr val="8B3A2E"/>
-                </a:solidFill>
-                <a:latin typeface="Calibri"/>
-              </a:rPr>
-              <a:t>DOK 2 · SKILL / CONCEPT</a:t>
-            </a:r>
-          </a:p>
-        </p:txBody>
-      </p:sp>
-      <p:sp>
-        <p:nvSpPr>
-          <p:cNvPr id="4" name="TextBox 3"/>
-          <p:cNvSpPr txBox="1"/>
-          <p:nvPr/>
-        </p:nvSpPr>
-        <p:spPr>
-          <a:xfrm>
-            <a:off x="640080" y="1783080"/>
-            <a:ext cx="10972800" cy="4800600"/>
-          </a:xfrm>
-          <a:prstGeom prst="rect">
-            <a:avLst/>
-          </a:prstGeom>
-          <a:noFill/>
-        </p:spPr>
-        <p:txBody>
-          <a:bodyPr wrap="square" lIns="0" rIns="0" tIns="0" bIns="0">
-            <a:spAutoFit/>
-          </a:bodyPr>
-          <a:lstStyle/>
-          <a:p>
-            <a:pPr>
-              <a:lnSpc>
-                <a:spcPct val="106000"/>
-              </a:lnSpc>
-              <a:spcAft>
-                <a:spcPts val="1600"/>
-              </a:spcAft>
-            </a:pPr>
-            <a:r>
-              <a:rPr sz="1900" b="1" i="0">
-                <a:solidFill>
-                  <a:srgbClr val="8B3A2E"/>
-                </a:solidFill>
-                <a:latin typeface="Calibri"/>
-              </a:rPr>
-              <a:t>Apply </a:t>
-            </a:r>
-            <a:r>
-              <a:rPr sz="1900" b="0" i="0">
-                <a:solidFill>
-                  <a:srgbClr val="0B1530"/>
-                </a:solidFill>
-                <a:latin typeface="Calibri"/>
-              </a:rPr>
-              <a:t>asks you to use a concept or classify, not just recall.</a:t>
-            </a:r>
-          </a:p>
-          <a:p>
-            <a:pPr>
-              <a:lnSpc>
-                <a:spcPct val="106000"/>
-              </a:lnSpc>
-              <a:spcAft>
-                <a:spcPts val="1600"/>
-              </a:spcAft>
-            </a:pPr>
-            <a:r>
-              <a:rPr sz="1900" b="1" i="0">
-                <a:solidFill>
-                  <a:srgbClr val="8B3A2E"/>
-                </a:solidFill>
-                <a:latin typeface="Calibri"/>
-              </a:rPr>
-              <a:t>Q. </a:t>
-            </a:r>
-            <a:r>
-              <a:rPr sz="1900" b="0" i="0">
-                <a:solidFill>
-                  <a:srgbClr val="0B1530"/>
-                </a:solidFill>
-                <a:latin typeface="Calibri"/>
-              </a:rPr>
-              <a:t>A patient has right-lower-quadrant tenderness. Which organ does that location most directly raise?  (Gallbladder / Appendix / Spleen)</a:t>
-            </a:r>
-          </a:p>
-          <a:p>
-            <a:pPr>
-              <a:lnSpc>
-                <a:spcPct val="106000"/>
-              </a:lnSpc>
-              <a:spcAft>
-                <a:spcPts val="1600"/>
-              </a:spcAft>
-            </a:pPr>
-            <a:r>
-              <a:rPr sz="1900" b="1" i="0">
-                <a:solidFill>
-                  <a:srgbClr val="8B3A2E"/>
-                </a:solidFill>
-                <a:latin typeface="Calibri"/>
-              </a:rPr>
-              <a:t>Answer: </a:t>
-            </a:r>
-            <a:r>
-              <a:rPr sz="1900" b="0" i="0">
-                <a:solidFill>
-                  <a:srgbClr val="0B1530"/>
-                </a:solidFill>
-                <a:latin typeface="Calibri"/>
-              </a:rPr>
-              <a:t>Appendix, which sits in the RLQ, so RLQ tenderness raises appendicitis.</a:t>
-            </a:r>
-          </a:p>
-        </p:txBody>
-      </p:sp>
-    </p:spTree>
-  </p:cSld>
-  <p:clrMapOvr>
-    <a:masterClrMapping/>
-  </p:clrMapOvr>
-</p:sld>
-</file>
-
-<file path=ppt/slides/slide32.xml><?xml version="1.0" encoding="utf-8"?>
-<p:sld xmlns:a="http://schemas.openxmlformats.org/drawingml/2006/main" xmlns:p="http://schemas.openxmlformats.org/presentationml/2006/main" xmlns:r="http://schemas.openxmlformats.org/officeDocument/2006/relationships">
-  <p:cSld>
-    <p:bg>
-      <p:bgPr>
-        <a:solidFill>
-          <a:srgbClr val="FFFFFF"/>
-        </a:solidFill>
-        <a:effectLst/>
-      </p:bgPr>
-    </p:bg>
-    <p:spTree>
-      <p:nvGrpSpPr>
-        <p:cNvPr id="1" name=""/>
-        <p:cNvGrpSpPr/>
-        <p:nvPr/>
-      </p:nvGrpSpPr>
-      <p:grpSpPr/>
-      <p:sp>
-        <p:nvSpPr>
-          <p:cNvPr id="2" name="Title 1"/>
-          <p:cNvSpPr>
-            <a:spLocks noGrp="1"/>
-          </p:cNvSpPr>
-          <p:nvPr>
-            <p:ph type="title"/>
-          </p:nvPr>
-        </p:nvSpPr>
-        <p:spPr>
-          <a:xfrm>
-            <a:off x="640080" y="713232"/>
-            <a:ext cx="10972800" cy="822960"/>
-          </a:xfrm>
-        </p:spPr>
-        <p:txBody>
-          <a:bodyPr/>
-          <a:lstStyle/>
-          <a:p>
-            <a:r>
-              <a:rPr sz="3000" b="1" i="0">
-                <a:solidFill>
-                  <a:srgbClr val="0B1530"/>
-                </a:solidFill>
-                <a:latin typeface="Calibri"/>
-              </a:rPr>
-              <a:t>Reason: put it together (DOK 3)</a:t>
-            </a:r>
-          </a:p>
-        </p:txBody>
-      </p:sp>
-      <p:sp>
-        <p:nvSpPr>
-          <p:cNvPr id="3" name="TextBox 2"/>
-          <p:cNvSpPr txBox="1"/>
-          <p:nvPr/>
-        </p:nvSpPr>
-        <p:spPr>
-          <a:xfrm>
-            <a:off x="640080" y="365760"/>
-            <a:ext cx="10972800" cy="365760"/>
-          </a:xfrm>
-          <a:prstGeom prst="rect">
-            <a:avLst/>
-          </a:prstGeom>
-          <a:noFill/>
-        </p:spPr>
-        <p:txBody>
-          <a:bodyPr wrap="square" lIns="0" rIns="0" tIns="0" bIns="0">
-            <a:spAutoFit/>
-          </a:bodyPr>
-          <a:lstStyle/>
-          <a:p>
-            <a:r>
-              <a:rPr sz="1200" b="1" i="0">
-                <a:solidFill>
-                  <a:srgbClr val="8B3A2E"/>
-                </a:solidFill>
-                <a:latin typeface="Calibri"/>
-              </a:rPr>
-              <a:t>DOK 3 · STRATEGIC REASONING</a:t>
-            </a:r>
-          </a:p>
-        </p:txBody>
-      </p:sp>
-      <p:sp>
-        <p:nvSpPr>
-          <p:cNvPr id="4" name="TextBox 3"/>
-          <p:cNvSpPr txBox="1"/>
-          <p:nvPr/>
-        </p:nvSpPr>
-        <p:spPr>
-          <a:xfrm>
-            <a:off x="640080" y="1783080"/>
-            <a:ext cx="10972800" cy="4800600"/>
-          </a:xfrm>
-          <a:prstGeom prst="rect">
-            <a:avLst/>
-          </a:prstGeom>
-          <a:noFill/>
-        </p:spPr>
-        <p:txBody>
-          <a:bodyPr wrap="square" lIns="0" rIns="0" tIns="0" bIns="0">
-            <a:spAutoFit/>
-          </a:bodyPr>
-          <a:lstStyle/>
-          <a:p>
-            <a:pPr>
-              <a:lnSpc>
-                <a:spcPct val="106000"/>
-              </a:lnSpc>
-              <a:spcAft>
-                <a:spcPts val="1200"/>
-              </a:spcAft>
-            </a:pPr>
-            <a:r>
-              <a:rPr sz="1800" b="1" i="0">
-                <a:solidFill>
-                  <a:srgbClr val="8B3A2E"/>
-                </a:solidFill>
-                <a:latin typeface="Calibri"/>
-              </a:rPr>
-              <a:t>Reason </a:t>
-            </a:r>
-            <a:r>
-              <a:rPr sz="1800" b="0" i="0">
-                <a:solidFill>
-                  <a:srgbClr val="0B1530"/>
-                </a:solidFill>
-                <a:latin typeface="Calibri"/>
-              </a:rPr>
-              <a:t>asks you to connect several ideas and justify the answer.</a:t>
-            </a:r>
-          </a:p>
-          <a:p>
-            <a:pPr>
-              <a:lnSpc>
-                <a:spcPct val="106000"/>
-              </a:lnSpc>
-              <a:spcAft>
-                <a:spcPts val="1200"/>
-              </a:spcAft>
-            </a:pPr>
-            <a:r>
-              <a:rPr sz="1800" b="1" i="0">
-                <a:solidFill>
-                  <a:srgbClr val="8B3A2E"/>
-                </a:solidFill>
-                <a:latin typeface="Calibri"/>
-              </a:rPr>
-              <a:t>Q. </a:t>
-            </a:r>
-            <a:r>
-              <a:rPr sz="1800" b="0" i="0">
-                <a:solidFill>
-                  <a:srgbClr val="0B1530"/>
-                </a:solidFill>
-                <a:latin typeface="Calibri"/>
-              </a:rPr>
-              <a:t>A note reads: free fluid in the pleural cavity, right side. Between which structures is the fluid, and what is it called?</a:t>
-            </a:r>
-          </a:p>
-          <a:p>
-            <a:pPr>
-              <a:lnSpc>
-                <a:spcPct val="106000"/>
-              </a:lnSpc>
-              <a:spcAft>
-                <a:spcPts val="1200"/>
-              </a:spcAft>
-            </a:pPr>
-            <a:r>
-              <a:rPr sz="1800" b="1" i="0">
-                <a:solidFill>
-                  <a:srgbClr val="8B3A2E"/>
-                </a:solidFill>
-                <a:latin typeface="Calibri"/>
-              </a:rPr>
-              <a:t>Answer: </a:t>
-            </a:r>
-            <a:r>
-              <a:rPr sz="1800" b="0" i="0">
-                <a:solidFill>
-                  <a:srgbClr val="0B1530"/>
-                </a:solidFill>
-                <a:latin typeface="Calibri"/>
-              </a:rPr>
-              <a:t>Between the parietal and visceral pleura, around the right lung, a pleural effusion. You linked the cavity, its two layers, and the clinical term.</a:t>
-            </a:r>
-          </a:p>
-        </p:txBody>
-      </p:sp>
-    </p:spTree>
-  </p:cSld>
-  <p:clrMapOvr>
-    <a:masterClrMapping/>
-  </p:clrMapOvr>
-</p:sld>
-</file>
-
-<file path=ppt/slides/slide33.xml><?xml version="1.0" encoding="utf-8"?>
-<p:sld xmlns:a="http://schemas.openxmlformats.org/drawingml/2006/main" xmlns:p="http://schemas.openxmlformats.org/presentationml/2006/main" xmlns:r="http://schemas.openxmlformats.org/officeDocument/2006/relationships">
-  <p:cSld>
-    <p:bg>
-      <p:bgPr>
-        <a:solidFill>
-          <a:srgbClr val="FFFFFF"/>
-        </a:solidFill>
-        <a:effectLst/>
-      </p:bgPr>
-    </p:bg>
-    <p:spTree>
-      <p:nvGrpSpPr>
-        <p:cNvPr id="1" name=""/>
-        <p:cNvGrpSpPr/>
-        <p:nvPr/>
-      </p:nvGrpSpPr>
-      <p:grpSpPr/>
-      <p:sp>
-        <p:nvSpPr>
-          <p:cNvPr id="2" name="Title 1"/>
-          <p:cNvSpPr>
-            <a:spLocks noGrp="1"/>
-          </p:cNvSpPr>
-          <p:nvPr>
-            <p:ph type="title"/>
-          </p:nvPr>
-        </p:nvSpPr>
-        <p:spPr>
-          <a:xfrm>
-            <a:off x="640080" y="713232"/>
-            <a:ext cx="10972800" cy="822960"/>
-          </a:xfrm>
-        </p:spPr>
-        <p:txBody>
-          <a:bodyPr/>
-          <a:lstStyle/>
-          <a:p>
-            <a:r>
-              <a:rPr sz="3000" b="1" i="0">
-                <a:solidFill>
-                  <a:srgbClr val="0B1530"/>
-                </a:solidFill>
-                <a:latin typeface="Calibri"/>
-              </a:rPr>
-              <a:t>Label it from memory</a:t>
-            </a:r>
-          </a:p>
-        </p:txBody>
-      </p:sp>
-      <p:sp>
-        <p:nvSpPr>
-          <p:cNvPr id="3" name="TextBox 2"/>
-          <p:cNvSpPr txBox="1"/>
-          <p:nvPr/>
-        </p:nvSpPr>
-        <p:spPr>
-          <a:xfrm>
-            <a:off x="640080" y="365760"/>
-            <a:ext cx="10972800" cy="365760"/>
-          </a:xfrm>
-          <a:prstGeom prst="rect">
-            <a:avLst/>
-          </a:prstGeom>
-          <a:noFill/>
-        </p:spPr>
-        <p:txBody>
-          <a:bodyPr wrap="square" lIns="0" rIns="0" tIns="0" bIns="0">
-            <a:spAutoFit/>
-          </a:bodyPr>
-          <a:lstStyle/>
-          <a:p>
-            <a:r>
-              <a:rPr sz="1200" b="1" i="0">
-                <a:solidFill>
-                  <a:srgbClr val="8B3A2E"/>
-                </a:solidFill>
-                <a:latin typeface="Calibri"/>
-              </a:rPr>
-              <a:t>HUMAN ANATOMY · FOUNDATIONS</a:t>
-            </a:r>
-          </a:p>
-        </p:txBody>
-      </p:sp>
-      <p:sp>
-        <p:nvSpPr>
-          <p:cNvPr id="4" name="TextBox 3"/>
-          <p:cNvSpPr txBox="1"/>
-          <p:nvPr/>
-        </p:nvSpPr>
-        <p:spPr>
-          <a:xfrm>
-            <a:off x="640080" y="1783080"/>
-            <a:ext cx="5852160" cy="4800600"/>
-          </a:xfrm>
-          <a:prstGeom prst="rect">
-            <a:avLst/>
-          </a:prstGeom>
-          <a:noFill/>
-        </p:spPr>
-        <p:txBody>
-          <a:bodyPr wrap="square" lIns="0" rIns="0" tIns="0" bIns="0">
-            <a:spAutoFit/>
-          </a:bodyPr>
-          <a:lstStyle/>
-          <a:p>
-            <a:pPr>
-              <a:lnSpc>
-                <a:spcPct val="106000"/>
-              </a:lnSpc>
-              <a:spcAft>
-                <a:spcPts val="1200"/>
-              </a:spcAft>
-            </a:pPr>
-            <a:r>
-              <a:rPr sz="1800" b="0" i="0">
-                <a:solidFill>
-                  <a:srgbClr val="0B1530"/>
-                </a:solidFill>
-                <a:latin typeface="Calibri"/>
-              </a:rPr>
-              <a:t>Cover the labeled slide. Name every arrow on this blank diagram.</a:t>
-            </a:r>
-          </a:p>
-          <a:p>
-            <a:pPr>
-              <a:lnSpc>
-                <a:spcPct val="106000"/>
-              </a:lnSpc>
-              <a:spcAft>
-                <a:spcPts val="1200"/>
-              </a:spcAft>
-            </a:pPr>
-            <a:r>
-              <a:rPr sz="1800" b="0" i="0">
-                <a:solidFill>
-                  <a:srgbClr val="0B1530"/>
-                </a:solidFill>
-                <a:latin typeface="Calibri"/>
-              </a:rPr>
-              <a:t>Then sort each region as axial or appendicular.</a:t>
-            </a:r>
-          </a:p>
-          <a:p>
-            <a:pPr>
-              <a:lnSpc>
-                <a:spcPct val="106000"/>
-              </a:lnSpc>
-              <a:spcAft>
-                <a:spcPts val="1200"/>
-              </a:spcAft>
-            </a:pPr>
-            <a:r>
-              <a:rPr sz="1800" b="0" i="0">
-                <a:solidFill>
-                  <a:srgbClr val="0B1530"/>
-                </a:solidFill>
-                <a:latin typeface="Calibri"/>
-              </a:rPr>
-              <a:t>Draw the four planes through the figure and say what each divides.</a:t>
-            </a:r>
-          </a:p>
-        </p:txBody>
-      </p:sp>
-      <p:pic>
-        <p:nvPicPr>
-          <p:cNvPr id="5" name="Picture 4" descr="Blank anterior view of the body with unlabeled arrows pointing to regions, for the student to fill in."/>
-          <p:cNvPicPr>
-            <a:picLocks noChangeAspect="1"/>
-          </p:cNvPicPr>
-          <p:nvPr/>
-        </p:nvPicPr>
-        <p:blipFill>
-          <a:blip r:embed="rId2"/>
-          <a:stretch>
-            <a:fillRect/>
-          </a:stretch>
-        </p:blipFill>
-        <p:spPr>
-          <a:xfrm>
-            <a:off x="6858000" y="1737360"/>
-            <a:ext cx="4937760" cy="2777490"/>
-          </a:xfrm>
-          <a:prstGeom prst="rect">
-            <a:avLst/>
-          </a:prstGeom>
-        </p:spPr>
-      </p:pic>
-    </p:spTree>
-  </p:cSld>
-  <p:clrMapOvr>
-    <a:masterClrMapping/>
-  </p:clrMapOvr>
-</p:sld>
-</file>
-
-<file path=ppt/slides/slide34.xml><?xml version="1.0" encoding="utf-8"?>
 <p:sld xmlns:a="http://schemas.openxmlformats.org/drawingml/2006/main" xmlns:p="http://schemas.openxmlformats.org/presentationml/2006/main" xmlns:r="http://schemas.openxmlformats.org/officeDocument/2006/relationships">
   <p:cSld>
     <p:bg>
@@ -7949,13 +7671,22 @@
               <a:t>•  </a:t>
             </a:r>
             <a:r>
+              <a:rPr sz="1800" b="1" i="0">
+                <a:solidFill>
+                  <a:srgbClr val="FFFFFF"/>
+                </a:solidFill>
+                <a:latin typeface="Calibri"/>
+              </a:rPr>
+              <a:t>Structure determines function</a:t>
+            </a:r>
+            <a:r>
               <a:rPr sz="1800" b="0" i="0">
                 <a:solidFill>
                   <a:srgbClr val="FFFFFF"/>
                 </a:solidFill>
                 <a:latin typeface="Calibri"/>
               </a:rPr>
-              <a:t>Structure determines function: anatomy is the vocabulary, physiology is what it does.</a:t>
+              <a:t>; anatomy is the vocabulary, physiology is what it does.</a:t>
             </a:r>
           </a:p>
           <a:p>
@@ -7977,13 +7708,22 @@
               <a:t>•  </a:t>
             </a:r>
             <a:r>
+              <a:rPr sz="1800" b="1" i="0">
+                <a:solidFill>
+                  <a:srgbClr val="FFFFFF"/>
+                </a:solidFill>
+                <a:latin typeface="Calibri"/>
+              </a:rPr>
+              <a:t>Anatomical position is the fixed reference</a:t>
+            </a:r>
+            <a:r>
               <a:rPr sz="1800" b="0" i="0">
                 <a:solidFill>
                   <a:srgbClr val="FFFFFF"/>
                 </a:solidFill>
                 <a:latin typeface="Calibri"/>
               </a:rPr>
-              <a:t>Anatomical position is the fixed reference; planes cut the body; directional terms come in pairs.</a:t>
+              <a:t>; planes cut the body; directional terms come in pairs.</a:t>
             </a:r>
           </a:p>
           <a:p>
@@ -8005,13 +7745,22 @@
               <a:t>•  </a:t>
             </a:r>
             <a:r>
+              <a:rPr sz="1800" b="1" i="0">
+                <a:solidFill>
+                  <a:srgbClr val="FFFFFF"/>
+                </a:solidFill>
+                <a:latin typeface="Calibri"/>
+              </a:rPr>
+              <a:t>Sort regional terms as axial or appendicular</a:t>
+            </a:r>
+            <a:r>
               <a:rPr sz="1800" b="0" i="0">
                 <a:solidFill>
                   <a:srgbClr val="FFFFFF"/>
                 </a:solidFill>
                 <a:latin typeface="Calibri"/>
               </a:rPr>
-              <a:t>Sort regional terms as axial (head, neck, trunk) or appendicular (limbs).</a:t>
+              <a:t>.</a:t>
             </a:r>
           </a:p>
           <a:p>
@@ -8033,13 +7782,22 @@
               <a:t>•  </a:t>
             </a:r>
             <a:r>
+              <a:rPr sz="1800" b="1" i="0">
+                <a:solidFill>
+                  <a:srgbClr val="FFFFFF"/>
+                </a:solidFill>
+                <a:latin typeface="Calibri"/>
+              </a:rPr>
+              <a:t>Cavities and quadrants localize organs</a:t>
+            </a:r>
+            <a:r>
               <a:rPr sz="1800" b="0" i="0">
                 <a:solidFill>
                   <a:srgbClr val="FFFFFF"/>
                 </a:solidFill>
                 <a:latin typeface="Calibri"/>
               </a:rPr>
-              <a:t>Cavities and quadrants localize organs; mediastinum is central, retroperitoneum is behind the peritoneum.</a:t>
+              <a:t>; mediastinum central, retroperitoneum behind the peritoneum.</a:t>
             </a:r>
           </a:p>
           <a:p>
@@ -8061,13 +7819,22 @@
               <a:t>•  </a:t>
             </a:r>
             <a:r>
+              <a:rPr sz="1800" b="1" i="0">
+                <a:solidFill>
+                  <a:srgbClr val="FFFFFF"/>
+                </a:solidFill>
+                <a:latin typeface="Calibri"/>
+              </a:rPr>
+              <a:t>Serous membranes</a:t>
+            </a:r>
+            <a:r>
               <a:rPr sz="1800" b="0" i="0">
                 <a:solidFill>
                   <a:srgbClr val="FFFFFF"/>
                 </a:solidFill>
                 <a:latin typeface="Calibri"/>
               </a:rPr>
-              <a:t>Serous membranes (pleura, pericardium, peritoneum) each have a parietal and visceral layer with fluid between.</a:t>
+              <a:t>each have a parietal and visceral layer with fluid between.</a:t>
             </a:r>
           </a:p>
         </p:txBody>
@@ -8119,7 +7886,7 @@
           <a:lstStyle/>
           <a:p>
             <a:r>
-              <a:rPr sz="3000" b="1" i="0">
+              <a:rPr sz="2900" b="1" i="0">
                 <a:solidFill>
                   <a:srgbClr val="0B1530"/>
                 </a:solidFill>
@@ -8159,7 +7926,7 @@
                 </a:solidFill>
                 <a:latin typeface="Calibri"/>
               </a:rPr>
-              <a:t>HUMAN ANATOMY · FOUNDATIONS</a:t>
+              <a:t>FOCUS: HUMAN ANATOMY · FOUNDATIONS</a:t>
             </a:r>
           </a:p>
         </p:txBody>
@@ -8188,7 +7955,7 @@
           <a:p>
             <a:pPr>
               <a:lnSpc>
-                <a:spcPct val="106000"/>
+                <a:spcPct val="105000"/>
               </a:lnSpc>
               <a:spcAft>
                 <a:spcPts val="800"/>
@@ -8210,13 +7977,13 @@
                 </a:solidFill>
                 <a:latin typeface="Calibri"/>
               </a:rPr>
-              <a:t>a defined process with a known mechanism (for example, pneumonia).</a:t>
+              <a:t>a defined process with a known mechanism.</a:t>
             </a:r>
           </a:p>
           <a:p>
             <a:pPr>
               <a:lnSpc>
-                <a:spcPct val="106000"/>
+                <a:spcPct val="105000"/>
               </a:lnSpc>
               <a:spcAft>
                 <a:spcPts val="800"/>
@@ -8244,7 +8011,7 @@
           <a:p>
             <a:pPr>
               <a:lnSpc>
-                <a:spcPct val="106000"/>
+                <a:spcPct val="105000"/>
               </a:lnSpc>
               <a:spcAft>
                 <a:spcPts val="800"/>
@@ -8272,7 +8039,7 @@
           <a:p>
             <a:pPr>
               <a:lnSpc>
-                <a:spcPct val="106000"/>
+                <a:spcPct val="105000"/>
               </a:lnSpc>
               <a:spcAft>
                 <a:spcPts val="800"/>
@@ -8300,7 +8067,7 @@
           <a:p>
             <a:pPr>
               <a:lnSpc>
-                <a:spcPct val="106000"/>
+                <a:spcPct val="105000"/>
               </a:lnSpc>
               <a:spcAft>
                 <a:spcPts val="800"/>
@@ -8328,7 +8095,7 @@
           <a:p>
             <a:pPr>
               <a:lnSpc>
-                <a:spcPct val="106000"/>
+                <a:spcPct val="105000"/>
               </a:lnSpc>
               <a:spcAft>
                 <a:spcPts val="800"/>
@@ -8350,7 +8117,7 @@
                 </a:solidFill>
                 <a:latin typeface="Calibri"/>
               </a:rPr>
-              <a:t>structure and function measured directly (blood values, X-ray, CT).</a:t>
+              <a:t>structure and function measured directly.</a:t>
             </a:r>
           </a:p>
         </p:txBody>
@@ -8402,7 +8169,7 @@
           <a:lstStyle/>
           <a:p>
             <a:r>
-              <a:rPr sz="3000" b="1" i="0">
+              <a:rPr sz="2900" b="1" i="0">
                 <a:solidFill>
                   <a:srgbClr val="0B1530"/>
                 </a:solidFill>
@@ -8442,14 +8209,14 @@
                 </a:solidFill>
                 <a:latin typeface="Calibri"/>
               </a:rPr>
-              <a:t>HUMAN ANATOMY · FOUNDATIONS</a:t>
+              <a:t>FOCUS: HUMAN ANATOMY · FOUNDATIONS</a:t>
             </a:r>
           </a:p>
         </p:txBody>
       </p:sp>
       <p:pic>
         <p:nvPicPr>
-          <p:cNvPr id="4" name="Picture 3" descr="Flow chart of the six levels of structural organization, building from smallest to largest: chemical (atoms and molecules), cellular (cells), tissue (groups of similar cells), organ (two or more tissues), organ-system (organs cooperating), organismal (all systems together, the whole person)."/>
+          <p:cNvPr id="4" name="Picture 3" descr="Flow chart of the six levels of structural organization from chemical to cellular, tissue, organ, organ-system, and organismal."/>
           <p:cNvPicPr>
             <a:picLocks noChangeAspect="1"/>
           </p:cNvPicPr>
@@ -8463,7 +8230,7 @@
         </p:blipFill>
         <p:spPr>
           <a:xfrm>
-            <a:off x="3108960" y="1691640"/>
+            <a:off x="3108960" y="1706499"/>
             <a:ext cx="5943600" cy="4725162"/>
           </a:xfrm>
           <a:prstGeom prst="rect">
@@ -8644,7 +8411,7 @@
           <a:lstStyle/>
           <a:p>
             <a:r>
-              <a:rPr sz="3000" b="1" i="0">
+              <a:rPr sz="2900" b="1" i="0">
                 <a:solidFill>
                   <a:srgbClr val="0B1530"/>
                 </a:solidFill>
@@ -8684,7 +8451,7 @@
                 </a:solidFill>
                 <a:latin typeface="Calibri"/>
               </a:rPr>
-              <a:t>HUMAN ANATOMY · FOUNDATIONS</a:t>
+              <a:t>FOCUS: HUMAN ANATOMY · FOUNDATIONS</a:t>
             </a:r>
           </a:p>
         </p:txBody>
@@ -8697,8 +8464,8 @@
         </p:nvSpPr>
         <p:spPr>
           <a:xfrm>
-            <a:off x="640080" y="1783080"/>
-            <a:ext cx="5852160" cy="4800600"/>
+            <a:off x="502920" y="1783080"/>
+            <a:ext cx="4526280" cy="4800600"/>
           </a:xfrm>
           <a:prstGeom prst="rect">
             <a:avLst/>
@@ -8713,7 +8480,7 @@
           <a:p>
             <a:pPr>
               <a:lnSpc>
-                <a:spcPct val="106000"/>
+                <a:spcPct val="105000"/>
               </a:lnSpc>
               <a:spcAft>
                 <a:spcPts val="1200"/>
@@ -8741,7 +8508,7 @@
           <a:p>
             <a:pPr>
               <a:lnSpc>
-                <a:spcPct val="106000"/>
+                <a:spcPct val="105000"/>
               </a:lnSpc>
               <a:spcAft>
                 <a:spcPts val="1200"/>
@@ -8763,13 +8530,13 @@
                 </a:solidFill>
                 <a:latin typeface="Calibri"/>
               </a:rPr>
-              <a:t>every directional term assumes this position, so a description never changes with how the person is lying or standing.</a:t>
+              <a:t>every directional term assumes this position.</a:t>
             </a:r>
           </a:p>
           <a:p>
             <a:pPr>
               <a:lnSpc>
-                <a:spcPct val="106000"/>
+                <a:spcPct val="105000"/>
               </a:lnSpc>
               <a:spcAft>
                 <a:spcPts val="1200"/>
@@ -8812,8 +8579,8 @@
         </p:blipFill>
         <p:spPr>
           <a:xfrm>
-            <a:off x="6858000" y="1691640"/>
-            <a:ext cx="4754880" cy="2674620"/>
+            <a:off x="5257800" y="2349047"/>
+            <a:ext cx="6446520" cy="3622944"/>
           </a:xfrm>
           <a:prstGeom prst="rect">
             <a:avLst/>
@@ -8867,7 +8634,7 @@
           <a:lstStyle/>
           <a:p>
             <a:r>
-              <a:rPr sz="3000" b="1" i="0">
+              <a:rPr sz="2900" b="1" i="0">
                 <a:solidFill>
                   <a:srgbClr val="0B1530"/>
                 </a:solidFill>
@@ -8907,7 +8674,7 @@
                 </a:solidFill>
                 <a:latin typeface="Calibri"/>
               </a:rPr>
-              <a:t>HUMAN ANATOMY · FOUNDATIONS</a:t>
+              <a:t>FOCUS: HUMAN ANATOMY · FOUNDATIONS</a:t>
             </a:r>
           </a:p>
         </p:txBody>
@@ -8920,8 +8687,8 @@
         </p:nvSpPr>
         <p:spPr>
           <a:xfrm>
-            <a:off x="640080" y="1783080"/>
-            <a:ext cx="5852160" cy="4800600"/>
+            <a:off x="502920" y="1783080"/>
+            <a:ext cx="4526280" cy="4800600"/>
           </a:xfrm>
           <a:prstGeom prst="rect">
             <a:avLst/>
@@ -8936,7 +8703,7 @@
           <a:p>
             <a:pPr>
               <a:lnSpc>
-                <a:spcPct val="106000"/>
+                <a:spcPct val="105000"/>
               </a:lnSpc>
               <a:spcAft>
                 <a:spcPts val="1000"/>
@@ -8958,13 +8725,13 @@
                 </a:solidFill>
                 <a:latin typeface="Calibri"/>
               </a:rPr>
-              <a:t>right and left parts. Midsagittal gives equal halves; parasagittal gives unequal parts.</a:t>
+              <a:t>right and left parts; midsagittal gives equal halves.</a:t>
             </a:r>
           </a:p>
           <a:p>
             <a:pPr>
               <a:lnSpc>
-                <a:spcPct val="106000"/>
+                <a:spcPct val="105000"/>
               </a:lnSpc>
               <a:spcAft>
                 <a:spcPts val="1000"/>
@@ -8992,7 +8759,7 @@
           <a:p>
             <a:pPr>
               <a:lnSpc>
-                <a:spcPct val="106000"/>
+                <a:spcPct val="105000"/>
               </a:lnSpc>
               <a:spcAft>
                 <a:spcPts val="1000"/>
@@ -9014,13 +8781,13 @@
                 </a:solidFill>
                 <a:latin typeface="Calibri"/>
               </a:rPr>
-              <a:t>superior and inferior parts, a cross section.</a:t>
+              <a:t>superior and inferior parts.</a:t>
             </a:r>
           </a:p>
           <a:p>
             <a:pPr>
               <a:lnSpc>
-                <a:spcPct val="106000"/>
+                <a:spcPct val="105000"/>
               </a:lnSpc>
               <a:spcAft>
                 <a:spcPts val="1000"/>
@@ -9049,7 +8816,7 @@
       </p:sp>
       <p:pic>
         <p:nvPicPr>
-          <p:cNvPr id="5" name="Picture 4" descr="Diagram of a standing body with the midsagittal, parasagittal, frontal (coronal), transverse, and oblique planes drawn through it and labeled."/>
+          <p:cNvPr id="5" name="Picture 4" descr="Diagram of a standing body with the midsagittal, parasagittal, frontal (coronal), transverse, and oblique planes labeled."/>
           <p:cNvPicPr>
             <a:picLocks noChangeAspect="1"/>
           </p:cNvPicPr>
@@ -9063,8 +8830,8 @@
         </p:blipFill>
         <p:spPr>
           <a:xfrm>
-            <a:off x="6858000" y="1691640"/>
-            <a:ext cx="4937760" cy="2777490"/>
+            <a:off x="5257800" y="2349047"/>
+            <a:ext cx="6446520" cy="3622944"/>
           </a:xfrm>
           <a:prstGeom prst="rect">
             <a:avLst/>
@@ -9118,7 +8885,7 @@
           <a:lstStyle/>
           <a:p>
             <a:r>
-              <a:rPr sz="3000" b="1" i="0">
+              <a:rPr sz="2900" b="1" i="0">
                 <a:solidFill>
                   <a:srgbClr val="0B1530"/>
                 </a:solidFill>
@@ -9158,7 +8925,7 @@
                 </a:solidFill>
                 <a:latin typeface="Calibri"/>
               </a:rPr>
-              <a:t>HUMAN ANATOMY · FOUNDATIONS</a:t>
+              <a:t>FOCUS: HUMAN ANATOMY · FOUNDATIONS</a:t>
             </a:r>
           </a:p>
         </p:txBody>
@@ -9171,8 +8938,8 @@
         </p:nvSpPr>
         <p:spPr>
           <a:xfrm>
-            <a:off x="640080" y="1783080"/>
-            <a:ext cx="10972800" cy="4800600"/>
+            <a:off x="502920" y="1783080"/>
+            <a:ext cx="4526280" cy="4800600"/>
           </a:xfrm>
           <a:prstGeom prst="rect">
             <a:avLst/>
@@ -9187,14 +8954,14 @@
           <a:p>
             <a:pPr>
               <a:lnSpc>
-                <a:spcPct val="106000"/>
+                <a:spcPct val="105000"/>
               </a:lnSpc>
               <a:spcAft>
-                <a:spcPts val="900"/>
+                <a:spcPts val="800"/>
               </a:spcAft>
             </a:pPr>
             <a:r>
-              <a:rPr sz="1800" b="1" i="0">
+              <a:rPr sz="1600" b="1" i="0">
                 <a:solidFill>
                   <a:srgbClr val="8B3A2E"/>
                 </a:solidFill>
@@ -9203,26 +8970,26 @@
               <a:t>Superior / Inferior: </a:t>
             </a:r>
             <a:r>
-              <a:rPr sz="1800" b="0" i="0">
+              <a:rPr sz="1600" b="0" i="0">
                 <a:solidFill>
                   <a:srgbClr val="0B1530"/>
                 </a:solidFill>
                 <a:latin typeface="Calibri"/>
               </a:rPr>
-              <a:t>above versus below; toward the head or the feet.</a:t>
+              <a:t>above versus below.</a:t>
             </a:r>
           </a:p>
           <a:p>
             <a:pPr>
               <a:lnSpc>
-                <a:spcPct val="106000"/>
+                <a:spcPct val="105000"/>
               </a:lnSpc>
               <a:spcAft>
-                <a:spcPts val="900"/>
+                <a:spcPts val="800"/>
               </a:spcAft>
             </a:pPr>
             <a:r>
-              <a:rPr sz="1800" b="1" i="0">
+              <a:rPr sz="1600" b="1" i="0">
                 <a:solidFill>
                   <a:srgbClr val="8B3A2E"/>
                 </a:solidFill>
@@ -9231,26 +8998,26 @@
               <a:t>Anterior (ventral) / Posterior (dorsal): </a:t>
             </a:r>
             <a:r>
-              <a:rPr sz="1800" b="0" i="0">
+              <a:rPr sz="1600" b="0" i="0">
                 <a:solidFill>
                   <a:srgbClr val="0B1530"/>
                 </a:solidFill>
                 <a:latin typeface="Calibri"/>
               </a:rPr>
-              <a:t>toward the front versus the back.</a:t>
+              <a:t>front versus back.</a:t>
             </a:r>
           </a:p>
           <a:p>
             <a:pPr>
               <a:lnSpc>
-                <a:spcPct val="106000"/>
+                <a:spcPct val="105000"/>
               </a:lnSpc>
               <a:spcAft>
-                <a:spcPts val="900"/>
+                <a:spcPts val="800"/>
               </a:spcAft>
             </a:pPr>
             <a:r>
-              <a:rPr sz="1800" b="1" i="0">
+              <a:rPr sz="1600" b="1" i="0">
                 <a:solidFill>
                   <a:srgbClr val="8B3A2E"/>
                 </a:solidFill>
@@ -9259,26 +9026,26 @@
               <a:t>Medial / Lateral: </a:t>
             </a:r>
             <a:r>
-              <a:rPr sz="1800" b="0" i="0">
+              <a:rPr sz="1600" b="0" i="0">
                 <a:solidFill>
                   <a:srgbClr val="0B1530"/>
                 </a:solidFill>
                 <a:latin typeface="Calibri"/>
               </a:rPr>
-              <a:t>toward the midline versus away from it.</a:t>
+              <a:t>toward versus away from the midline.</a:t>
             </a:r>
           </a:p>
           <a:p>
             <a:pPr>
               <a:lnSpc>
-                <a:spcPct val="106000"/>
+                <a:spcPct val="105000"/>
               </a:lnSpc>
               <a:spcAft>
-                <a:spcPts val="900"/>
+                <a:spcPts val="800"/>
               </a:spcAft>
             </a:pPr>
             <a:r>
-              <a:rPr sz="1800" b="1" i="0">
+              <a:rPr sz="1600" b="1" i="0">
                 <a:solidFill>
                   <a:srgbClr val="8B3A2E"/>
                 </a:solidFill>
@@ -9287,26 +9054,26 @@
               <a:t>Proximal / Distal: </a:t>
             </a:r>
             <a:r>
-              <a:rPr sz="1800" b="0" i="0">
+              <a:rPr sz="1600" b="0" i="0">
                 <a:solidFill>
                   <a:srgbClr val="0B1530"/>
                 </a:solidFill>
                 <a:latin typeface="Calibri"/>
               </a:rPr>
-              <a:t>nearer versus farther from the trunk (limbs).</a:t>
+              <a:t>nearer versus farther from the trunk.</a:t>
             </a:r>
           </a:p>
           <a:p>
             <a:pPr>
               <a:lnSpc>
-                <a:spcPct val="106000"/>
+                <a:spcPct val="105000"/>
               </a:lnSpc>
               <a:spcAft>
-                <a:spcPts val="900"/>
+                <a:spcPts val="800"/>
               </a:spcAft>
             </a:pPr>
             <a:r>
-              <a:rPr sz="1800" b="1" i="0">
+              <a:rPr sz="1600" b="1" i="0">
                 <a:solidFill>
                   <a:srgbClr val="8B3A2E"/>
                 </a:solidFill>
@@ -9315,26 +9082,26 @@
               <a:t>Superficial / Deep: </a:t>
             </a:r>
             <a:r>
-              <a:rPr sz="1800" b="0" i="0">
+              <a:rPr sz="1600" b="0" i="0">
                 <a:solidFill>
                   <a:srgbClr val="0B1530"/>
                 </a:solidFill>
                 <a:latin typeface="Calibri"/>
               </a:rPr>
-              <a:t>toward versus away from the body surface.</a:t>
+              <a:t>toward versus away from the surface.</a:t>
             </a:r>
           </a:p>
           <a:p>
             <a:pPr>
               <a:lnSpc>
-                <a:spcPct val="106000"/>
+                <a:spcPct val="105000"/>
               </a:lnSpc>
               <a:spcAft>
-                <a:spcPts val="900"/>
+                <a:spcPts val="800"/>
               </a:spcAft>
             </a:pPr>
             <a:r>
-              <a:rPr sz="1800" b="1" i="0">
+              <a:rPr sz="1600" b="1" i="0">
                 <a:solidFill>
                   <a:srgbClr val="8B3A2E"/>
                 </a:solidFill>
@@ -9343,17 +9110,41 @@
               <a:t>Ipsilateral / Contralateral: </a:t>
             </a:r>
             <a:r>
-              <a:rPr sz="1800" b="0" i="0">
+              <a:rPr sz="1600" b="0" i="0">
                 <a:solidFill>
                   <a:srgbClr val="0B1530"/>
                 </a:solidFill>
                 <a:latin typeface="Calibri"/>
               </a:rPr>
-              <a:t>same side versus opposite side.</a:t>
-            </a:r>
-          </a:p>
-        </p:txBody>
-      </p:sp>
+              <a:t>same versus opposite side.</a:t>
+            </a:r>
+          </a:p>
+        </p:txBody>
+      </p:sp>
+      <p:pic>
+        <p:nvPicPr>
+          <p:cNvPr id="5" name="Picture 4" descr="Diagram of the body showing the anatomical planes and the paired directional terms."/>
+          <p:cNvPicPr>
+            <a:picLocks noChangeAspect="1"/>
+          </p:cNvPicPr>
+          <p:nvPr/>
+        </p:nvPicPr>
+        <p:blipFill>
+          <a:blip r:embed="rId2"/>
+          <a:stretch>
+            <a:fillRect/>
+          </a:stretch>
+        </p:blipFill>
+        <p:spPr>
+          <a:xfrm>
+            <a:off x="5257800" y="2349047"/>
+            <a:ext cx="6446520" cy="3622944"/>
+          </a:xfrm>
+          <a:prstGeom prst="rect">
+            <a:avLst/>
+          </a:prstGeom>
+        </p:spPr>
+      </p:pic>
     </p:spTree>
   </p:cSld>
   <p:clrMapOvr>

--- a/Foundations-Human-Anatomy.pptx
+++ b/Foundations-Human-Anatomy.pptx
@@ -3249,6 +3249,75 @@
           </a:prstGeom>
         </p:spPr>
       </p:pic>
+      <p:pic>
+        <p:nvPicPr>
+          <p:cNvPr id="6" name="Picture 5" descr="QR code that opens the interactive web version of this deck at drsrennie-stack.github.io/A-P-lecture-core/foundations-human-anatomy.html"/>
+          <p:cNvPicPr>
+            <a:picLocks noChangeAspect="1"/>
+          </p:cNvPicPr>
+          <p:nvPr/>
+        </p:nvPicPr>
+        <p:blipFill>
+          <a:blip r:embed="rId3"/>
+          <a:stretch>
+            <a:fillRect/>
+          </a:stretch>
+        </p:blipFill>
+        <p:spPr>
+          <a:xfrm>
+            <a:off x="10195560" y="4343400"/>
+            <a:ext cx="1463040" cy="1463040"/>
+          </a:xfrm>
+          <a:prstGeom prst="rect">
+            <a:avLst/>
+          </a:prstGeom>
+        </p:spPr>
+      </p:pic>
+      <p:sp>
+        <p:nvSpPr>
+          <p:cNvPr id="7" name="TextBox 6"/>
+          <p:cNvSpPr txBox="1"/>
+          <p:nvPr/>
+        </p:nvSpPr>
+        <p:spPr>
+          <a:xfrm>
+            <a:off x="7680960" y="5943600"/>
+            <a:ext cx="4206240" cy="640080"/>
+          </a:xfrm>
+          <a:prstGeom prst="rect">
+            <a:avLst/>
+          </a:prstGeom>
+          <a:noFill/>
+        </p:spPr>
+        <p:txBody>
+          <a:bodyPr wrap="square" lIns="0" rIns="0" tIns="0" bIns="0">
+            <a:spAutoFit/>
+          </a:bodyPr>
+          <a:lstStyle/>
+          <a:p>
+            <a:r>
+              <a:rPr sz="1200" b="1" i="0">
+                <a:solidFill>
+                  <a:srgbClr val="C9A14A"/>
+                </a:solidFill>
+                <a:latin typeface="Calibri"/>
+              </a:rPr>
+              <a:t>Scan for the interactive page</a:t>
+            </a:r>
+          </a:p>
+          <a:p>
+            <a:r>
+              <a:rPr sz="1100" b="0" i="0">
+                <a:solidFill>
+                  <a:srgbClr val="E6EAF0"/>
+                </a:solidFill>
+                <a:latin typeface="Calibri"/>
+              </a:rPr>
+              <a:t>Download the .pptx and accessible PDF from Canvas or the course repo.</a:t>
+            </a:r>
+          </a:p>
+        </p:txBody>
+      </p:sp>
     </p:spTree>
   </p:cSld>
   <p:clrMapOvr>
